--- a/Dooray/download/Dooray_연동pptx.pptx
+++ b/Dooray/download/Dooray_연동pptx.pptx
@@ -5,8 +5,16 @@
     <p:sldMasterId id="2147483648" r:id="rId1"/>
   </p:sldMasterIdLst>
   <p:sldIdLst>
-    <p:sldId id="256" r:id="rId2"/>
-    <p:sldId id="257" r:id="rId3"/>
+    <p:sldId id="262" r:id="rId2"/>
+    <p:sldId id="258" r:id="rId3"/>
+    <p:sldId id="259" r:id="rId4"/>
+    <p:sldId id="260" r:id="rId5"/>
+    <p:sldId id="261" r:id="rId6"/>
+    <p:sldId id="263" r:id="rId7"/>
+    <p:sldId id="256" r:id="rId8"/>
+    <p:sldId id="257" r:id="rId9"/>
+    <p:sldId id="264" r:id="rId10"/>
+    <p:sldId id="265" r:id="rId11"/>
   </p:sldIdLst>
   <p:sldSz cx="12192000" cy="6858000"/>
   <p:notesSz cx="6858000" cy="9144000"/>
@@ -105,6 +113,22 @@
       </a:defRPr>
     </a:lvl9pPr>
   </p:defaultTextStyle>
+  <p:extLst>
+    <p:ext uri="{EFAFB233-063F-42B5-8137-9DF3F51BA10A}">
+      <p15:sldGuideLst xmlns:p15="http://schemas.microsoft.com/office/powerpoint/2012/main">
+        <p15:guide id="1" orient="horz" pos="2160">
+          <p15:clr>
+            <a:srgbClr val="A4A3A4"/>
+          </p15:clr>
+        </p15:guide>
+        <p15:guide id="2" pos="3840">
+          <p15:clr>
+            <a:srgbClr val="A4A3A4"/>
+          </p15:clr>
+        </p15:guide>
+      </p15:sldGuideLst>
+    </p:ext>
+  </p:extLst>
 </p:presentation>
 </file>
 
@@ -130,7 +154,7 @@
           <p:cNvPr id="2" name="제목 1">
             <a:extLst>
               <a:ext uri="{FF2B5EF4-FFF2-40B4-BE49-F238E27FC236}">
-                <a16:creationId xmlns:a16="http://schemas.microsoft.com/office/drawing/2014/main" xmlns="" id="{2EFBAB1F-34AB-6B69-5221-8D2B8439A008}"/>
+                <a16:creationId xmlns:a16="http://schemas.microsoft.com/office/drawing/2014/main" id="{2EFBAB1F-34AB-6B69-5221-8D2B8439A008}"/>
               </a:ext>
             </a:extLst>
           </p:cNvPr>
@@ -167,7 +191,7 @@
           <p:cNvPr id="3" name="부제목 2">
             <a:extLst>
               <a:ext uri="{FF2B5EF4-FFF2-40B4-BE49-F238E27FC236}">
-                <a16:creationId xmlns:a16="http://schemas.microsoft.com/office/drawing/2014/main" xmlns="" id="{F9675691-ED84-F398-D94A-3B608E73A017}"/>
+                <a16:creationId xmlns:a16="http://schemas.microsoft.com/office/drawing/2014/main" id="{F9675691-ED84-F398-D94A-3B608E73A017}"/>
               </a:ext>
             </a:extLst>
           </p:cNvPr>
@@ -237,7 +261,7 @@
           <p:cNvPr id="4" name="날짜 개체 틀 3">
             <a:extLst>
               <a:ext uri="{FF2B5EF4-FFF2-40B4-BE49-F238E27FC236}">
-                <a16:creationId xmlns:a16="http://schemas.microsoft.com/office/drawing/2014/main" xmlns="" id="{A5FD9D88-69BD-5A06-8C6E-ABD1D13FC4ED}"/>
+                <a16:creationId xmlns:a16="http://schemas.microsoft.com/office/drawing/2014/main" id="{A5FD9D88-69BD-5A06-8C6E-ABD1D13FC4ED}"/>
               </a:ext>
             </a:extLst>
           </p:cNvPr>
@@ -255,7 +279,7 @@
           <a:p>
             <a:fld id="{76710B8B-6F51-4D95-A437-79DC47C11399}" type="datetimeFigureOut">
               <a:rPr lang="ko-KR" altLang="en-US" smtClean="0"/>
-              <a:t>2026-07-21</a:t>
+              <a:t>2026-07-22</a:t>
             </a:fld>
             <a:endParaRPr lang="ko-KR" altLang="en-US"/>
           </a:p>
@@ -266,7 +290,7 @@
           <p:cNvPr id="5" name="바닥글 개체 틀 4">
             <a:extLst>
               <a:ext uri="{FF2B5EF4-FFF2-40B4-BE49-F238E27FC236}">
-                <a16:creationId xmlns:a16="http://schemas.microsoft.com/office/drawing/2014/main" xmlns="" id="{D13857C9-0ED4-B5BF-F5D4-9052827DFEA1}"/>
+                <a16:creationId xmlns:a16="http://schemas.microsoft.com/office/drawing/2014/main" id="{D13857C9-0ED4-B5BF-F5D4-9052827DFEA1}"/>
               </a:ext>
             </a:extLst>
           </p:cNvPr>
@@ -291,7 +315,7 @@
           <p:cNvPr id="6" name="슬라이드 번호 개체 틀 5">
             <a:extLst>
               <a:ext uri="{FF2B5EF4-FFF2-40B4-BE49-F238E27FC236}">
-                <a16:creationId xmlns:a16="http://schemas.microsoft.com/office/drawing/2014/main" xmlns="" id="{21261486-CD94-F66A-0F11-66B718A855BF}"/>
+                <a16:creationId xmlns:a16="http://schemas.microsoft.com/office/drawing/2014/main" id="{21261486-CD94-F66A-0F11-66B718A855BF}"/>
               </a:ext>
             </a:extLst>
           </p:cNvPr>
@@ -350,7 +374,7 @@
           <p:cNvPr id="2" name="제목 1">
             <a:extLst>
               <a:ext uri="{FF2B5EF4-FFF2-40B4-BE49-F238E27FC236}">
-                <a16:creationId xmlns:a16="http://schemas.microsoft.com/office/drawing/2014/main" xmlns="" id="{2E22BCDC-0544-3D53-D4FC-58964EA39FCD}"/>
+                <a16:creationId xmlns:a16="http://schemas.microsoft.com/office/drawing/2014/main" id="{2E22BCDC-0544-3D53-D4FC-58964EA39FCD}"/>
               </a:ext>
             </a:extLst>
           </p:cNvPr>
@@ -378,7 +402,7 @@
           <p:cNvPr id="3" name="세로 텍스트 개체 틀 2">
             <a:extLst>
               <a:ext uri="{FF2B5EF4-FFF2-40B4-BE49-F238E27FC236}">
-                <a16:creationId xmlns:a16="http://schemas.microsoft.com/office/drawing/2014/main" xmlns="" id="{F3E3D0A6-E675-78E2-7C27-F215C527A4C0}"/>
+                <a16:creationId xmlns:a16="http://schemas.microsoft.com/office/drawing/2014/main" id="{F3E3D0A6-E675-78E2-7C27-F215C527A4C0}"/>
               </a:ext>
             </a:extLst>
           </p:cNvPr>
@@ -435,7 +459,7 @@
           <p:cNvPr id="4" name="날짜 개체 틀 3">
             <a:extLst>
               <a:ext uri="{FF2B5EF4-FFF2-40B4-BE49-F238E27FC236}">
-                <a16:creationId xmlns:a16="http://schemas.microsoft.com/office/drawing/2014/main" xmlns="" id="{8751E774-081D-1767-7838-FB4F86CA6EFE}"/>
+                <a16:creationId xmlns:a16="http://schemas.microsoft.com/office/drawing/2014/main" id="{8751E774-081D-1767-7838-FB4F86CA6EFE}"/>
               </a:ext>
             </a:extLst>
           </p:cNvPr>
@@ -453,7 +477,7 @@
           <a:p>
             <a:fld id="{76710B8B-6F51-4D95-A437-79DC47C11399}" type="datetimeFigureOut">
               <a:rPr lang="ko-KR" altLang="en-US" smtClean="0"/>
-              <a:t>2026-07-21</a:t>
+              <a:t>2026-07-22</a:t>
             </a:fld>
             <a:endParaRPr lang="ko-KR" altLang="en-US"/>
           </a:p>
@@ -464,7 +488,7 @@
           <p:cNvPr id="5" name="바닥글 개체 틀 4">
             <a:extLst>
               <a:ext uri="{FF2B5EF4-FFF2-40B4-BE49-F238E27FC236}">
-                <a16:creationId xmlns:a16="http://schemas.microsoft.com/office/drawing/2014/main" xmlns="" id="{7EEE29A4-FF10-FC44-20FF-FDE2A3B55A47}"/>
+                <a16:creationId xmlns:a16="http://schemas.microsoft.com/office/drawing/2014/main" id="{7EEE29A4-FF10-FC44-20FF-FDE2A3B55A47}"/>
               </a:ext>
             </a:extLst>
           </p:cNvPr>
@@ -489,7 +513,7 @@
           <p:cNvPr id="6" name="슬라이드 번호 개체 틀 5">
             <a:extLst>
               <a:ext uri="{FF2B5EF4-FFF2-40B4-BE49-F238E27FC236}">
-                <a16:creationId xmlns:a16="http://schemas.microsoft.com/office/drawing/2014/main" xmlns="" id="{94BB5B5E-6D1E-FF34-93D3-6192CD5C2757}"/>
+                <a16:creationId xmlns:a16="http://schemas.microsoft.com/office/drawing/2014/main" id="{94BB5B5E-6D1E-FF34-93D3-6192CD5C2757}"/>
               </a:ext>
             </a:extLst>
           </p:cNvPr>
@@ -548,7 +572,7 @@
           <p:cNvPr id="2" name="세로 제목 1">
             <a:extLst>
               <a:ext uri="{FF2B5EF4-FFF2-40B4-BE49-F238E27FC236}">
-                <a16:creationId xmlns:a16="http://schemas.microsoft.com/office/drawing/2014/main" xmlns="" id="{F9C266FD-C6BA-88BD-4C87-FD6D777229D5}"/>
+                <a16:creationId xmlns:a16="http://schemas.microsoft.com/office/drawing/2014/main" id="{F9C266FD-C6BA-88BD-4C87-FD6D777229D5}"/>
               </a:ext>
             </a:extLst>
           </p:cNvPr>
@@ -581,7 +605,7 @@
           <p:cNvPr id="3" name="세로 텍스트 개체 틀 2">
             <a:extLst>
               <a:ext uri="{FF2B5EF4-FFF2-40B4-BE49-F238E27FC236}">
-                <a16:creationId xmlns:a16="http://schemas.microsoft.com/office/drawing/2014/main" xmlns="" id="{5EF456C9-38C9-54A2-958F-548A95DB002D}"/>
+                <a16:creationId xmlns:a16="http://schemas.microsoft.com/office/drawing/2014/main" id="{5EF456C9-38C9-54A2-958F-548A95DB002D}"/>
               </a:ext>
             </a:extLst>
           </p:cNvPr>
@@ -643,7 +667,7 @@
           <p:cNvPr id="4" name="날짜 개체 틀 3">
             <a:extLst>
               <a:ext uri="{FF2B5EF4-FFF2-40B4-BE49-F238E27FC236}">
-                <a16:creationId xmlns:a16="http://schemas.microsoft.com/office/drawing/2014/main" xmlns="" id="{3177A3BB-F059-EF64-38C4-B12D6A32F370}"/>
+                <a16:creationId xmlns:a16="http://schemas.microsoft.com/office/drawing/2014/main" id="{3177A3BB-F059-EF64-38C4-B12D6A32F370}"/>
               </a:ext>
             </a:extLst>
           </p:cNvPr>
@@ -661,7 +685,7 @@
           <a:p>
             <a:fld id="{76710B8B-6F51-4D95-A437-79DC47C11399}" type="datetimeFigureOut">
               <a:rPr lang="ko-KR" altLang="en-US" smtClean="0"/>
-              <a:t>2026-07-21</a:t>
+              <a:t>2026-07-22</a:t>
             </a:fld>
             <a:endParaRPr lang="ko-KR" altLang="en-US"/>
           </a:p>
@@ -672,7 +696,7 @@
           <p:cNvPr id="5" name="바닥글 개체 틀 4">
             <a:extLst>
               <a:ext uri="{FF2B5EF4-FFF2-40B4-BE49-F238E27FC236}">
-                <a16:creationId xmlns:a16="http://schemas.microsoft.com/office/drawing/2014/main" xmlns="" id="{6C853008-B88C-7FEC-3094-125AA8711CB9}"/>
+                <a16:creationId xmlns:a16="http://schemas.microsoft.com/office/drawing/2014/main" id="{6C853008-B88C-7FEC-3094-125AA8711CB9}"/>
               </a:ext>
             </a:extLst>
           </p:cNvPr>
@@ -697,7 +721,7 @@
           <p:cNvPr id="6" name="슬라이드 번호 개체 틀 5">
             <a:extLst>
               <a:ext uri="{FF2B5EF4-FFF2-40B4-BE49-F238E27FC236}">
-                <a16:creationId xmlns:a16="http://schemas.microsoft.com/office/drawing/2014/main" xmlns="" id="{84DC1595-D9E8-7CC9-E5DB-891BAD8C66E6}"/>
+                <a16:creationId xmlns:a16="http://schemas.microsoft.com/office/drawing/2014/main" id="{84DC1595-D9E8-7CC9-E5DB-891BAD8C66E6}"/>
               </a:ext>
             </a:extLst>
           </p:cNvPr>
@@ -756,7 +780,7 @@
           <p:cNvPr id="2" name="제목 1">
             <a:extLst>
               <a:ext uri="{FF2B5EF4-FFF2-40B4-BE49-F238E27FC236}">
-                <a16:creationId xmlns:a16="http://schemas.microsoft.com/office/drawing/2014/main" xmlns="" id="{BB1275EF-8F39-698A-273A-9626B5F88DAE}"/>
+                <a16:creationId xmlns:a16="http://schemas.microsoft.com/office/drawing/2014/main" id="{BB1275EF-8F39-698A-273A-9626B5F88DAE}"/>
               </a:ext>
             </a:extLst>
           </p:cNvPr>
@@ -784,7 +808,7 @@
           <p:cNvPr id="3" name="내용 개체 틀 2">
             <a:extLst>
               <a:ext uri="{FF2B5EF4-FFF2-40B4-BE49-F238E27FC236}">
-                <a16:creationId xmlns:a16="http://schemas.microsoft.com/office/drawing/2014/main" xmlns="" id="{FE8BAED0-6A9F-5F26-4189-2E08BCD7ABAF}"/>
+                <a16:creationId xmlns:a16="http://schemas.microsoft.com/office/drawing/2014/main" id="{FE8BAED0-6A9F-5F26-4189-2E08BCD7ABAF}"/>
               </a:ext>
             </a:extLst>
           </p:cNvPr>
@@ -841,7 +865,7 @@
           <p:cNvPr id="4" name="날짜 개체 틀 3">
             <a:extLst>
               <a:ext uri="{FF2B5EF4-FFF2-40B4-BE49-F238E27FC236}">
-                <a16:creationId xmlns:a16="http://schemas.microsoft.com/office/drawing/2014/main" xmlns="" id="{3BBBAD90-52F2-B71A-0C8B-F2BA64DCE7CB}"/>
+                <a16:creationId xmlns:a16="http://schemas.microsoft.com/office/drawing/2014/main" id="{3BBBAD90-52F2-B71A-0C8B-F2BA64DCE7CB}"/>
               </a:ext>
             </a:extLst>
           </p:cNvPr>
@@ -859,7 +883,7 @@
           <a:p>
             <a:fld id="{76710B8B-6F51-4D95-A437-79DC47C11399}" type="datetimeFigureOut">
               <a:rPr lang="ko-KR" altLang="en-US" smtClean="0"/>
-              <a:t>2026-07-21</a:t>
+              <a:t>2026-07-22</a:t>
             </a:fld>
             <a:endParaRPr lang="ko-KR" altLang="en-US"/>
           </a:p>
@@ -870,7 +894,7 @@
           <p:cNvPr id="5" name="바닥글 개체 틀 4">
             <a:extLst>
               <a:ext uri="{FF2B5EF4-FFF2-40B4-BE49-F238E27FC236}">
-                <a16:creationId xmlns:a16="http://schemas.microsoft.com/office/drawing/2014/main" xmlns="" id="{36F4E08A-AD2F-D035-02FF-ECE74026EB1B}"/>
+                <a16:creationId xmlns:a16="http://schemas.microsoft.com/office/drawing/2014/main" id="{36F4E08A-AD2F-D035-02FF-ECE74026EB1B}"/>
               </a:ext>
             </a:extLst>
           </p:cNvPr>
@@ -895,7 +919,7 @@
           <p:cNvPr id="6" name="슬라이드 번호 개체 틀 5">
             <a:extLst>
               <a:ext uri="{FF2B5EF4-FFF2-40B4-BE49-F238E27FC236}">
-                <a16:creationId xmlns:a16="http://schemas.microsoft.com/office/drawing/2014/main" xmlns="" id="{C05881F8-5DDA-9FE7-1A67-C082A572A1ED}"/>
+                <a16:creationId xmlns:a16="http://schemas.microsoft.com/office/drawing/2014/main" id="{C05881F8-5DDA-9FE7-1A67-C082A572A1ED}"/>
               </a:ext>
             </a:extLst>
           </p:cNvPr>
@@ -954,7 +978,7 @@
           <p:cNvPr id="2" name="제목 1">
             <a:extLst>
               <a:ext uri="{FF2B5EF4-FFF2-40B4-BE49-F238E27FC236}">
-                <a16:creationId xmlns:a16="http://schemas.microsoft.com/office/drawing/2014/main" xmlns="" id="{2B0C67BC-5301-D4C2-EFE9-2BE2396EFBB6}"/>
+                <a16:creationId xmlns:a16="http://schemas.microsoft.com/office/drawing/2014/main" id="{2B0C67BC-5301-D4C2-EFE9-2BE2396EFBB6}"/>
               </a:ext>
             </a:extLst>
           </p:cNvPr>
@@ -991,7 +1015,7 @@
           <p:cNvPr id="3" name="텍스트 개체 틀 2">
             <a:extLst>
               <a:ext uri="{FF2B5EF4-FFF2-40B4-BE49-F238E27FC236}">
-                <a16:creationId xmlns:a16="http://schemas.microsoft.com/office/drawing/2014/main" xmlns="" id="{6C3ECB2B-A59A-BE7B-A7BE-987F40E4337E}"/>
+                <a16:creationId xmlns:a16="http://schemas.microsoft.com/office/drawing/2014/main" id="{6C3ECB2B-A59A-BE7B-A7BE-987F40E4337E}"/>
               </a:ext>
             </a:extLst>
           </p:cNvPr>
@@ -1116,7 +1140,7 @@
           <p:cNvPr id="4" name="날짜 개체 틀 3">
             <a:extLst>
               <a:ext uri="{FF2B5EF4-FFF2-40B4-BE49-F238E27FC236}">
-                <a16:creationId xmlns:a16="http://schemas.microsoft.com/office/drawing/2014/main" xmlns="" id="{A581BD30-A7BA-18D1-0EBA-39F14E03E42B}"/>
+                <a16:creationId xmlns:a16="http://schemas.microsoft.com/office/drawing/2014/main" id="{A581BD30-A7BA-18D1-0EBA-39F14E03E42B}"/>
               </a:ext>
             </a:extLst>
           </p:cNvPr>
@@ -1134,7 +1158,7 @@
           <a:p>
             <a:fld id="{76710B8B-6F51-4D95-A437-79DC47C11399}" type="datetimeFigureOut">
               <a:rPr lang="ko-KR" altLang="en-US" smtClean="0"/>
-              <a:t>2026-07-21</a:t>
+              <a:t>2026-07-22</a:t>
             </a:fld>
             <a:endParaRPr lang="ko-KR" altLang="en-US"/>
           </a:p>
@@ -1145,7 +1169,7 @@
           <p:cNvPr id="5" name="바닥글 개체 틀 4">
             <a:extLst>
               <a:ext uri="{FF2B5EF4-FFF2-40B4-BE49-F238E27FC236}">
-                <a16:creationId xmlns:a16="http://schemas.microsoft.com/office/drawing/2014/main" xmlns="" id="{11CB699C-4BA1-D033-1F59-5BDFE7330682}"/>
+                <a16:creationId xmlns:a16="http://schemas.microsoft.com/office/drawing/2014/main" id="{11CB699C-4BA1-D033-1F59-5BDFE7330682}"/>
               </a:ext>
             </a:extLst>
           </p:cNvPr>
@@ -1170,7 +1194,7 @@
           <p:cNvPr id="6" name="슬라이드 번호 개체 틀 5">
             <a:extLst>
               <a:ext uri="{FF2B5EF4-FFF2-40B4-BE49-F238E27FC236}">
-                <a16:creationId xmlns:a16="http://schemas.microsoft.com/office/drawing/2014/main" xmlns="" id="{B74BBE01-57A1-EF8B-6B2F-82EF83511939}"/>
+                <a16:creationId xmlns:a16="http://schemas.microsoft.com/office/drawing/2014/main" id="{B74BBE01-57A1-EF8B-6B2F-82EF83511939}"/>
               </a:ext>
             </a:extLst>
           </p:cNvPr>
@@ -1229,7 +1253,7 @@
           <p:cNvPr id="2" name="제목 1">
             <a:extLst>
               <a:ext uri="{FF2B5EF4-FFF2-40B4-BE49-F238E27FC236}">
-                <a16:creationId xmlns:a16="http://schemas.microsoft.com/office/drawing/2014/main" xmlns="" id="{BE89D6E1-F1E9-0B68-8A6E-5DBE7DFB39F2}"/>
+                <a16:creationId xmlns:a16="http://schemas.microsoft.com/office/drawing/2014/main" id="{BE89D6E1-F1E9-0B68-8A6E-5DBE7DFB39F2}"/>
               </a:ext>
             </a:extLst>
           </p:cNvPr>
@@ -1257,7 +1281,7 @@
           <p:cNvPr id="3" name="내용 개체 틀 2">
             <a:extLst>
               <a:ext uri="{FF2B5EF4-FFF2-40B4-BE49-F238E27FC236}">
-                <a16:creationId xmlns:a16="http://schemas.microsoft.com/office/drawing/2014/main" xmlns="" id="{577C6727-6B31-A072-3D9C-691A800FF6D9}"/>
+                <a16:creationId xmlns:a16="http://schemas.microsoft.com/office/drawing/2014/main" id="{577C6727-6B31-A072-3D9C-691A800FF6D9}"/>
               </a:ext>
             </a:extLst>
           </p:cNvPr>
@@ -1319,7 +1343,7 @@
           <p:cNvPr id="4" name="내용 개체 틀 3">
             <a:extLst>
               <a:ext uri="{FF2B5EF4-FFF2-40B4-BE49-F238E27FC236}">
-                <a16:creationId xmlns:a16="http://schemas.microsoft.com/office/drawing/2014/main" xmlns="" id="{E2C1C8C2-95BC-B4A2-7597-2D01226B1ADF}"/>
+                <a16:creationId xmlns:a16="http://schemas.microsoft.com/office/drawing/2014/main" id="{E2C1C8C2-95BC-B4A2-7597-2D01226B1ADF}"/>
               </a:ext>
             </a:extLst>
           </p:cNvPr>
@@ -1381,7 +1405,7 @@
           <p:cNvPr id="5" name="날짜 개체 틀 4">
             <a:extLst>
               <a:ext uri="{FF2B5EF4-FFF2-40B4-BE49-F238E27FC236}">
-                <a16:creationId xmlns:a16="http://schemas.microsoft.com/office/drawing/2014/main" xmlns="" id="{76E81BE7-26AD-713C-6B95-F4C13FF044CC}"/>
+                <a16:creationId xmlns:a16="http://schemas.microsoft.com/office/drawing/2014/main" id="{76E81BE7-26AD-713C-6B95-F4C13FF044CC}"/>
               </a:ext>
             </a:extLst>
           </p:cNvPr>
@@ -1399,7 +1423,7 @@
           <a:p>
             <a:fld id="{76710B8B-6F51-4D95-A437-79DC47C11399}" type="datetimeFigureOut">
               <a:rPr lang="ko-KR" altLang="en-US" smtClean="0"/>
-              <a:t>2026-07-21</a:t>
+              <a:t>2026-07-22</a:t>
             </a:fld>
             <a:endParaRPr lang="ko-KR" altLang="en-US"/>
           </a:p>
@@ -1410,7 +1434,7 @@
           <p:cNvPr id="6" name="바닥글 개체 틀 5">
             <a:extLst>
               <a:ext uri="{FF2B5EF4-FFF2-40B4-BE49-F238E27FC236}">
-                <a16:creationId xmlns:a16="http://schemas.microsoft.com/office/drawing/2014/main" xmlns="" id="{DD9B5003-CEFB-9C56-AC1C-606C759F9C60}"/>
+                <a16:creationId xmlns:a16="http://schemas.microsoft.com/office/drawing/2014/main" id="{DD9B5003-CEFB-9C56-AC1C-606C759F9C60}"/>
               </a:ext>
             </a:extLst>
           </p:cNvPr>
@@ -1435,7 +1459,7 @@
           <p:cNvPr id="7" name="슬라이드 번호 개체 틀 6">
             <a:extLst>
               <a:ext uri="{FF2B5EF4-FFF2-40B4-BE49-F238E27FC236}">
-                <a16:creationId xmlns:a16="http://schemas.microsoft.com/office/drawing/2014/main" xmlns="" id="{571B7B9A-EAF5-07E4-C174-FD1EA5A42C5E}"/>
+                <a16:creationId xmlns:a16="http://schemas.microsoft.com/office/drawing/2014/main" id="{571B7B9A-EAF5-07E4-C174-FD1EA5A42C5E}"/>
               </a:ext>
             </a:extLst>
           </p:cNvPr>
@@ -1494,7 +1518,7 @@
           <p:cNvPr id="2" name="제목 1">
             <a:extLst>
               <a:ext uri="{FF2B5EF4-FFF2-40B4-BE49-F238E27FC236}">
-                <a16:creationId xmlns:a16="http://schemas.microsoft.com/office/drawing/2014/main" xmlns="" id="{ACA0021E-9FF2-CC71-40E2-48C90E27E1AD}"/>
+                <a16:creationId xmlns:a16="http://schemas.microsoft.com/office/drawing/2014/main" id="{ACA0021E-9FF2-CC71-40E2-48C90E27E1AD}"/>
               </a:ext>
             </a:extLst>
           </p:cNvPr>
@@ -1527,7 +1551,7 @@
           <p:cNvPr id="3" name="텍스트 개체 틀 2">
             <a:extLst>
               <a:ext uri="{FF2B5EF4-FFF2-40B4-BE49-F238E27FC236}">
-                <a16:creationId xmlns:a16="http://schemas.microsoft.com/office/drawing/2014/main" xmlns="" id="{96560712-3D7E-BB1A-0F94-49CCCF615C88}"/>
+                <a16:creationId xmlns:a16="http://schemas.microsoft.com/office/drawing/2014/main" id="{96560712-3D7E-BB1A-0F94-49CCCF615C88}"/>
               </a:ext>
             </a:extLst>
           </p:cNvPr>
@@ -1598,7 +1622,7 @@
           <p:cNvPr id="4" name="내용 개체 틀 3">
             <a:extLst>
               <a:ext uri="{FF2B5EF4-FFF2-40B4-BE49-F238E27FC236}">
-                <a16:creationId xmlns:a16="http://schemas.microsoft.com/office/drawing/2014/main" xmlns="" id="{130EA5D4-2D1D-B57D-51AC-532EB45E2446}"/>
+                <a16:creationId xmlns:a16="http://schemas.microsoft.com/office/drawing/2014/main" id="{130EA5D4-2D1D-B57D-51AC-532EB45E2446}"/>
               </a:ext>
             </a:extLst>
           </p:cNvPr>
@@ -1660,7 +1684,7 @@
           <p:cNvPr id="5" name="텍스트 개체 틀 4">
             <a:extLst>
               <a:ext uri="{FF2B5EF4-FFF2-40B4-BE49-F238E27FC236}">
-                <a16:creationId xmlns:a16="http://schemas.microsoft.com/office/drawing/2014/main" xmlns="" id="{667A6E2E-F327-FBDA-D97A-9DC61F343105}"/>
+                <a16:creationId xmlns:a16="http://schemas.microsoft.com/office/drawing/2014/main" id="{667A6E2E-F327-FBDA-D97A-9DC61F343105}"/>
               </a:ext>
             </a:extLst>
           </p:cNvPr>
@@ -1731,7 +1755,7 @@
           <p:cNvPr id="6" name="내용 개체 틀 5">
             <a:extLst>
               <a:ext uri="{FF2B5EF4-FFF2-40B4-BE49-F238E27FC236}">
-                <a16:creationId xmlns:a16="http://schemas.microsoft.com/office/drawing/2014/main" xmlns="" id="{E4EE7435-3206-B846-E281-E1137CDD8382}"/>
+                <a16:creationId xmlns:a16="http://schemas.microsoft.com/office/drawing/2014/main" id="{E4EE7435-3206-B846-E281-E1137CDD8382}"/>
               </a:ext>
             </a:extLst>
           </p:cNvPr>
@@ -1793,7 +1817,7 @@
           <p:cNvPr id="7" name="날짜 개체 틀 6">
             <a:extLst>
               <a:ext uri="{FF2B5EF4-FFF2-40B4-BE49-F238E27FC236}">
-                <a16:creationId xmlns:a16="http://schemas.microsoft.com/office/drawing/2014/main" xmlns="" id="{029A34DD-747E-6D83-56E3-D2BBAF59D4BE}"/>
+                <a16:creationId xmlns:a16="http://schemas.microsoft.com/office/drawing/2014/main" id="{029A34DD-747E-6D83-56E3-D2BBAF59D4BE}"/>
               </a:ext>
             </a:extLst>
           </p:cNvPr>
@@ -1811,7 +1835,7 @@
           <a:p>
             <a:fld id="{76710B8B-6F51-4D95-A437-79DC47C11399}" type="datetimeFigureOut">
               <a:rPr lang="ko-KR" altLang="en-US" smtClean="0"/>
-              <a:t>2026-07-21</a:t>
+              <a:t>2026-07-22</a:t>
             </a:fld>
             <a:endParaRPr lang="ko-KR" altLang="en-US"/>
           </a:p>
@@ -1822,7 +1846,7 @@
           <p:cNvPr id="8" name="바닥글 개체 틀 7">
             <a:extLst>
               <a:ext uri="{FF2B5EF4-FFF2-40B4-BE49-F238E27FC236}">
-                <a16:creationId xmlns:a16="http://schemas.microsoft.com/office/drawing/2014/main" xmlns="" id="{1C451F2E-185F-5866-0AE4-F15E83A97C66}"/>
+                <a16:creationId xmlns:a16="http://schemas.microsoft.com/office/drawing/2014/main" id="{1C451F2E-185F-5866-0AE4-F15E83A97C66}"/>
               </a:ext>
             </a:extLst>
           </p:cNvPr>
@@ -1847,7 +1871,7 @@
           <p:cNvPr id="9" name="슬라이드 번호 개체 틀 8">
             <a:extLst>
               <a:ext uri="{FF2B5EF4-FFF2-40B4-BE49-F238E27FC236}">
-                <a16:creationId xmlns:a16="http://schemas.microsoft.com/office/drawing/2014/main" xmlns="" id="{97217190-EB03-A086-BD62-1638CD7FA79A}"/>
+                <a16:creationId xmlns:a16="http://schemas.microsoft.com/office/drawing/2014/main" id="{97217190-EB03-A086-BD62-1638CD7FA79A}"/>
               </a:ext>
             </a:extLst>
           </p:cNvPr>
@@ -1906,7 +1930,7 @@
           <p:cNvPr id="2" name="제목 1">
             <a:extLst>
               <a:ext uri="{FF2B5EF4-FFF2-40B4-BE49-F238E27FC236}">
-                <a16:creationId xmlns:a16="http://schemas.microsoft.com/office/drawing/2014/main" xmlns="" id="{1E4C1E3C-947E-89A4-34C7-5770535CF736}"/>
+                <a16:creationId xmlns:a16="http://schemas.microsoft.com/office/drawing/2014/main" id="{1E4C1E3C-947E-89A4-34C7-5770535CF736}"/>
               </a:ext>
             </a:extLst>
           </p:cNvPr>
@@ -1934,7 +1958,7 @@
           <p:cNvPr id="3" name="날짜 개체 틀 2">
             <a:extLst>
               <a:ext uri="{FF2B5EF4-FFF2-40B4-BE49-F238E27FC236}">
-                <a16:creationId xmlns:a16="http://schemas.microsoft.com/office/drawing/2014/main" xmlns="" id="{E4184EA9-A034-5F1B-497A-27286E969DF6}"/>
+                <a16:creationId xmlns:a16="http://schemas.microsoft.com/office/drawing/2014/main" id="{E4184EA9-A034-5F1B-497A-27286E969DF6}"/>
               </a:ext>
             </a:extLst>
           </p:cNvPr>
@@ -1952,7 +1976,7 @@
           <a:p>
             <a:fld id="{76710B8B-6F51-4D95-A437-79DC47C11399}" type="datetimeFigureOut">
               <a:rPr lang="ko-KR" altLang="en-US" smtClean="0"/>
-              <a:t>2026-07-21</a:t>
+              <a:t>2026-07-22</a:t>
             </a:fld>
             <a:endParaRPr lang="ko-KR" altLang="en-US"/>
           </a:p>
@@ -1963,7 +1987,7 @@
           <p:cNvPr id="4" name="바닥글 개체 틀 3">
             <a:extLst>
               <a:ext uri="{FF2B5EF4-FFF2-40B4-BE49-F238E27FC236}">
-                <a16:creationId xmlns:a16="http://schemas.microsoft.com/office/drawing/2014/main" xmlns="" id="{3FD3BDAF-13D2-0646-1344-2CC337BA19C1}"/>
+                <a16:creationId xmlns:a16="http://schemas.microsoft.com/office/drawing/2014/main" id="{3FD3BDAF-13D2-0646-1344-2CC337BA19C1}"/>
               </a:ext>
             </a:extLst>
           </p:cNvPr>
@@ -1988,7 +2012,7 @@
           <p:cNvPr id="5" name="슬라이드 번호 개체 틀 4">
             <a:extLst>
               <a:ext uri="{FF2B5EF4-FFF2-40B4-BE49-F238E27FC236}">
-                <a16:creationId xmlns:a16="http://schemas.microsoft.com/office/drawing/2014/main" xmlns="" id="{3DDF2B44-D66A-19DF-BD95-AC295BBC960B}"/>
+                <a16:creationId xmlns:a16="http://schemas.microsoft.com/office/drawing/2014/main" id="{3DDF2B44-D66A-19DF-BD95-AC295BBC960B}"/>
               </a:ext>
             </a:extLst>
           </p:cNvPr>
@@ -2047,7 +2071,7 @@
           <p:cNvPr id="2" name="날짜 개체 틀 1">
             <a:extLst>
               <a:ext uri="{FF2B5EF4-FFF2-40B4-BE49-F238E27FC236}">
-                <a16:creationId xmlns:a16="http://schemas.microsoft.com/office/drawing/2014/main" xmlns="" id="{68E6D3D9-D221-134C-312A-D08196069719}"/>
+                <a16:creationId xmlns:a16="http://schemas.microsoft.com/office/drawing/2014/main" id="{68E6D3D9-D221-134C-312A-D08196069719}"/>
               </a:ext>
             </a:extLst>
           </p:cNvPr>
@@ -2065,7 +2089,7 @@
           <a:p>
             <a:fld id="{76710B8B-6F51-4D95-A437-79DC47C11399}" type="datetimeFigureOut">
               <a:rPr lang="ko-KR" altLang="en-US" smtClean="0"/>
-              <a:t>2026-07-21</a:t>
+              <a:t>2026-07-22</a:t>
             </a:fld>
             <a:endParaRPr lang="ko-KR" altLang="en-US"/>
           </a:p>
@@ -2076,7 +2100,7 @@
           <p:cNvPr id="3" name="바닥글 개체 틀 2">
             <a:extLst>
               <a:ext uri="{FF2B5EF4-FFF2-40B4-BE49-F238E27FC236}">
-                <a16:creationId xmlns:a16="http://schemas.microsoft.com/office/drawing/2014/main" xmlns="" id="{333D6B86-0BE1-95C6-FD29-957AD407B783}"/>
+                <a16:creationId xmlns:a16="http://schemas.microsoft.com/office/drawing/2014/main" id="{333D6B86-0BE1-95C6-FD29-957AD407B783}"/>
               </a:ext>
             </a:extLst>
           </p:cNvPr>
@@ -2101,7 +2125,7 @@
           <p:cNvPr id="4" name="슬라이드 번호 개체 틀 3">
             <a:extLst>
               <a:ext uri="{FF2B5EF4-FFF2-40B4-BE49-F238E27FC236}">
-                <a16:creationId xmlns:a16="http://schemas.microsoft.com/office/drawing/2014/main" xmlns="" id="{942CF037-FE3C-0446-5BC4-F6FE68F2DEFC}"/>
+                <a16:creationId xmlns:a16="http://schemas.microsoft.com/office/drawing/2014/main" id="{942CF037-FE3C-0446-5BC4-F6FE68F2DEFC}"/>
               </a:ext>
             </a:extLst>
           </p:cNvPr>
@@ -2160,7 +2184,7 @@
           <p:cNvPr id="2" name="제목 1">
             <a:extLst>
               <a:ext uri="{FF2B5EF4-FFF2-40B4-BE49-F238E27FC236}">
-                <a16:creationId xmlns:a16="http://schemas.microsoft.com/office/drawing/2014/main" xmlns="" id="{E6AFD32B-AC93-AA05-22D8-4FE6A0E59E8A}"/>
+                <a16:creationId xmlns:a16="http://schemas.microsoft.com/office/drawing/2014/main" id="{E6AFD32B-AC93-AA05-22D8-4FE6A0E59E8A}"/>
               </a:ext>
             </a:extLst>
           </p:cNvPr>
@@ -2197,7 +2221,7 @@
           <p:cNvPr id="3" name="내용 개체 틀 2">
             <a:extLst>
               <a:ext uri="{FF2B5EF4-FFF2-40B4-BE49-F238E27FC236}">
-                <a16:creationId xmlns:a16="http://schemas.microsoft.com/office/drawing/2014/main" xmlns="" id="{93690156-F782-65AE-D8A2-99196DDE9EC2}"/>
+                <a16:creationId xmlns:a16="http://schemas.microsoft.com/office/drawing/2014/main" id="{93690156-F782-65AE-D8A2-99196DDE9EC2}"/>
               </a:ext>
             </a:extLst>
           </p:cNvPr>
@@ -2287,7 +2311,7 @@
           <p:cNvPr id="4" name="텍스트 개체 틀 3">
             <a:extLst>
               <a:ext uri="{FF2B5EF4-FFF2-40B4-BE49-F238E27FC236}">
-                <a16:creationId xmlns:a16="http://schemas.microsoft.com/office/drawing/2014/main" xmlns="" id="{FE4D965D-1060-CA9D-BB35-D6E55B2BA733}"/>
+                <a16:creationId xmlns:a16="http://schemas.microsoft.com/office/drawing/2014/main" id="{FE4D965D-1060-CA9D-BB35-D6E55B2BA733}"/>
               </a:ext>
             </a:extLst>
           </p:cNvPr>
@@ -2358,7 +2382,7 @@
           <p:cNvPr id="5" name="날짜 개체 틀 4">
             <a:extLst>
               <a:ext uri="{FF2B5EF4-FFF2-40B4-BE49-F238E27FC236}">
-                <a16:creationId xmlns:a16="http://schemas.microsoft.com/office/drawing/2014/main" xmlns="" id="{7A244DEA-2580-4B42-F84E-F2CFF7C0FF42}"/>
+                <a16:creationId xmlns:a16="http://schemas.microsoft.com/office/drawing/2014/main" id="{7A244DEA-2580-4B42-F84E-F2CFF7C0FF42}"/>
               </a:ext>
             </a:extLst>
           </p:cNvPr>
@@ -2376,7 +2400,7 @@
           <a:p>
             <a:fld id="{76710B8B-6F51-4D95-A437-79DC47C11399}" type="datetimeFigureOut">
               <a:rPr lang="ko-KR" altLang="en-US" smtClean="0"/>
-              <a:t>2026-07-21</a:t>
+              <a:t>2026-07-22</a:t>
             </a:fld>
             <a:endParaRPr lang="ko-KR" altLang="en-US"/>
           </a:p>
@@ -2387,7 +2411,7 @@
           <p:cNvPr id="6" name="바닥글 개체 틀 5">
             <a:extLst>
               <a:ext uri="{FF2B5EF4-FFF2-40B4-BE49-F238E27FC236}">
-                <a16:creationId xmlns:a16="http://schemas.microsoft.com/office/drawing/2014/main" xmlns="" id="{E9543CED-A37D-388A-2EF0-2C7BFBD4C650}"/>
+                <a16:creationId xmlns:a16="http://schemas.microsoft.com/office/drawing/2014/main" id="{E9543CED-A37D-388A-2EF0-2C7BFBD4C650}"/>
               </a:ext>
             </a:extLst>
           </p:cNvPr>
@@ -2412,7 +2436,7 @@
           <p:cNvPr id="7" name="슬라이드 번호 개체 틀 6">
             <a:extLst>
               <a:ext uri="{FF2B5EF4-FFF2-40B4-BE49-F238E27FC236}">
-                <a16:creationId xmlns:a16="http://schemas.microsoft.com/office/drawing/2014/main" xmlns="" id="{ACD00779-B163-9E3E-7EE8-B6715B016DBE}"/>
+                <a16:creationId xmlns:a16="http://schemas.microsoft.com/office/drawing/2014/main" id="{ACD00779-B163-9E3E-7EE8-B6715B016DBE}"/>
               </a:ext>
             </a:extLst>
           </p:cNvPr>
@@ -2471,7 +2495,7 @@
           <p:cNvPr id="2" name="제목 1">
             <a:extLst>
               <a:ext uri="{FF2B5EF4-FFF2-40B4-BE49-F238E27FC236}">
-                <a16:creationId xmlns:a16="http://schemas.microsoft.com/office/drawing/2014/main" xmlns="" id="{0C832192-10C9-A0E3-8A11-B62D09E47DBE}"/>
+                <a16:creationId xmlns:a16="http://schemas.microsoft.com/office/drawing/2014/main" id="{0C832192-10C9-A0E3-8A11-B62D09E47DBE}"/>
               </a:ext>
             </a:extLst>
           </p:cNvPr>
@@ -2508,7 +2532,7 @@
           <p:cNvPr id="3" name="그림 개체 틀 2">
             <a:extLst>
               <a:ext uri="{FF2B5EF4-FFF2-40B4-BE49-F238E27FC236}">
-                <a16:creationId xmlns:a16="http://schemas.microsoft.com/office/drawing/2014/main" xmlns="" id="{875BA216-ED4F-1AE7-3303-6DA4B4F3F033}"/>
+                <a16:creationId xmlns:a16="http://schemas.microsoft.com/office/drawing/2014/main" id="{875BA216-ED4F-1AE7-3303-6DA4B4F3F033}"/>
               </a:ext>
             </a:extLst>
           </p:cNvPr>
@@ -2575,7 +2599,7 @@
           <p:cNvPr id="4" name="텍스트 개체 틀 3">
             <a:extLst>
               <a:ext uri="{FF2B5EF4-FFF2-40B4-BE49-F238E27FC236}">
-                <a16:creationId xmlns:a16="http://schemas.microsoft.com/office/drawing/2014/main" xmlns="" id="{7E7CC420-60C8-0365-99C0-B60A8968DEE2}"/>
+                <a16:creationId xmlns:a16="http://schemas.microsoft.com/office/drawing/2014/main" id="{7E7CC420-60C8-0365-99C0-B60A8968DEE2}"/>
               </a:ext>
             </a:extLst>
           </p:cNvPr>
@@ -2646,7 +2670,7 @@
           <p:cNvPr id="5" name="날짜 개체 틀 4">
             <a:extLst>
               <a:ext uri="{FF2B5EF4-FFF2-40B4-BE49-F238E27FC236}">
-                <a16:creationId xmlns:a16="http://schemas.microsoft.com/office/drawing/2014/main" xmlns="" id="{353793E3-02C7-2ED0-6C56-068636492848}"/>
+                <a16:creationId xmlns:a16="http://schemas.microsoft.com/office/drawing/2014/main" id="{353793E3-02C7-2ED0-6C56-068636492848}"/>
               </a:ext>
             </a:extLst>
           </p:cNvPr>
@@ -2664,7 +2688,7 @@
           <a:p>
             <a:fld id="{76710B8B-6F51-4D95-A437-79DC47C11399}" type="datetimeFigureOut">
               <a:rPr lang="ko-KR" altLang="en-US" smtClean="0"/>
-              <a:t>2026-07-21</a:t>
+              <a:t>2026-07-22</a:t>
             </a:fld>
             <a:endParaRPr lang="ko-KR" altLang="en-US"/>
           </a:p>
@@ -2675,7 +2699,7 @@
           <p:cNvPr id="6" name="바닥글 개체 틀 5">
             <a:extLst>
               <a:ext uri="{FF2B5EF4-FFF2-40B4-BE49-F238E27FC236}">
-                <a16:creationId xmlns:a16="http://schemas.microsoft.com/office/drawing/2014/main" xmlns="" id="{490B0F84-F380-A2E2-ED38-0ADF475D7067}"/>
+                <a16:creationId xmlns:a16="http://schemas.microsoft.com/office/drawing/2014/main" id="{490B0F84-F380-A2E2-ED38-0ADF475D7067}"/>
               </a:ext>
             </a:extLst>
           </p:cNvPr>
@@ -2700,7 +2724,7 @@
           <p:cNvPr id="7" name="슬라이드 번호 개체 틀 6">
             <a:extLst>
               <a:ext uri="{FF2B5EF4-FFF2-40B4-BE49-F238E27FC236}">
-                <a16:creationId xmlns:a16="http://schemas.microsoft.com/office/drawing/2014/main" xmlns="" id="{F831E842-1404-C22E-9D1F-9BE242A8EC32}"/>
+                <a16:creationId xmlns:a16="http://schemas.microsoft.com/office/drawing/2014/main" id="{F831E842-1404-C22E-9D1F-9BE242A8EC32}"/>
               </a:ext>
             </a:extLst>
           </p:cNvPr>
@@ -2764,7 +2788,7 @@
           <p:cNvPr id="2" name="제목 개체 틀 1">
             <a:extLst>
               <a:ext uri="{FF2B5EF4-FFF2-40B4-BE49-F238E27FC236}">
-                <a16:creationId xmlns:a16="http://schemas.microsoft.com/office/drawing/2014/main" xmlns="" id="{D62DE3F5-BBF6-9FC3-93B5-BDC7F9E11A87}"/>
+                <a16:creationId xmlns:a16="http://schemas.microsoft.com/office/drawing/2014/main" id="{D62DE3F5-BBF6-9FC3-93B5-BDC7F9E11A87}"/>
               </a:ext>
             </a:extLst>
           </p:cNvPr>
@@ -2802,7 +2826,7 @@
           <p:cNvPr id="3" name="텍스트 개체 틀 2">
             <a:extLst>
               <a:ext uri="{FF2B5EF4-FFF2-40B4-BE49-F238E27FC236}">
-                <a16:creationId xmlns:a16="http://schemas.microsoft.com/office/drawing/2014/main" xmlns="" id="{2443EF8F-F331-94D4-1BC1-C12B367F9226}"/>
+                <a16:creationId xmlns:a16="http://schemas.microsoft.com/office/drawing/2014/main" id="{2443EF8F-F331-94D4-1BC1-C12B367F9226}"/>
               </a:ext>
             </a:extLst>
           </p:cNvPr>
@@ -2869,7 +2893,7 @@
           <p:cNvPr id="4" name="날짜 개체 틀 3">
             <a:extLst>
               <a:ext uri="{FF2B5EF4-FFF2-40B4-BE49-F238E27FC236}">
-                <a16:creationId xmlns:a16="http://schemas.microsoft.com/office/drawing/2014/main" xmlns="" id="{5DBC0CD8-EA83-2E7D-D2A7-94E09C925160}"/>
+                <a16:creationId xmlns:a16="http://schemas.microsoft.com/office/drawing/2014/main" id="{5DBC0CD8-EA83-2E7D-D2A7-94E09C925160}"/>
               </a:ext>
             </a:extLst>
           </p:cNvPr>
@@ -2905,7 +2929,7 @@
           <a:p>
             <a:fld id="{76710B8B-6F51-4D95-A437-79DC47C11399}" type="datetimeFigureOut">
               <a:rPr lang="ko-KR" altLang="en-US" smtClean="0"/>
-              <a:t>2026-07-21</a:t>
+              <a:t>2026-07-22</a:t>
             </a:fld>
             <a:endParaRPr lang="ko-KR" altLang="en-US"/>
           </a:p>
@@ -2916,7 +2940,7 @@
           <p:cNvPr id="5" name="바닥글 개체 틀 4">
             <a:extLst>
               <a:ext uri="{FF2B5EF4-FFF2-40B4-BE49-F238E27FC236}">
-                <a16:creationId xmlns:a16="http://schemas.microsoft.com/office/drawing/2014/main" xmlns="" id="{F7C01173-CDC8-F2AC-CEC9-B9548EC9393D}"/>
+                <a16:creationId xmlns:a16="http://schemas.microsoft.com/office/drawing/2014/main" id="{F7C01173-CDC8-F2AC-CEC9-B9548EC9393D}"/>
               </a:ext>
             </a:extLst>
           </p:cNvPr>
@@ -2959,7 +2983,7 @@
           <p:cNvPr id="6" name="슬라이드 번호 개체 틀 5">
             <a:extLst>
               <a:ext uri="{FF2B5EF4-FFF2-40B4-BE49-F238E27FC236}">
-                <a16:creationId xmlns:a16="http://schemas.microsoft.com/office/drawing/2014/main" xmlns="" id="{30AF0B18-8377-7FF1-8FCB-D187F16305DD}"/>
+                <a16:creationId xmlns:a16="http://schemas.microsoft.com/office/drawing/2014/main" id="{30AF0B18-8377-7FF1-8FCB-D187F16305DD}"/>
               </a:ext>
             </a:extLst>
           </p:cNvPr>
@@ -3322,12 +3346,89 @@
           <a:chExt cx="0" cy="0"/>
         </a:xfrm>
       </p:grpSpPr>
+      <p:sp>
+        <p:nvSpPr>
+          <p:cNvPr id="4" name="TextBox 3">
+            <a:extLst>
+              <a:ext uri="{FF2B5EF4-FFF2-40B4-BE49-F238E27FC236}">
+                <a16:creationId xmlns:a16="http://schemas.microsoft.com/office/drawing/2014/main" id="{E3301818-8708-5A3A-A795-B2A7107C7D3E}"/>
+              </a:ext>
+            </a:extLst>
+          </p:cNvPr>
+          <p:cNvSpPr txBox="1"/>
+          <p:nvPr/>
+        </p:nvSpPr>
+        <p:spPr>
+          <a:xfrm>
+            <a:off x="2178604" y="2976403"/>
+            <a:ext cx="7430239" cy="769441"/>
+          </a:xfrm>
+          <a:prstGeom prst="rect">
+            <a:avLst/>
+          </a:prstGeom>
+          <a:noFill/>
+        </p:spPr>
+        <p:txBody>
+          <a:bodyPr wrap="none" rtlCol="0">
+            <a:spAutoFit/>
+          </a:bodyPr>
+          <a:lstStyle/>
+          <a:p>
+            <a:r>
+              <a:rPr lang="en-US" altLang="ko-KR" sz="4400" dirty="0"/>
+              <a:t>1. </a:t>
+            </a:r>
+            <a:r>
+              <a:rPr lang="en-US" altLang="ko-KR" sz="4400" dirty="0" err="1"/>
+              <a:t>Dooray</a:t>
+            </a:r>
+            <a:r>
+              <a:rPr lang="en-US" altLang="ko-KR" sz="4400" dirty="0"/>
+              <a:t> CLI</a:t>
+            </a:r>
+            <a:r>
+              <a:rPr lang="ko-KR" altLang="en-US" sz="4400" dirty="0"/>
+              <a:t> 업무 적용방법</a:t>
+            </a:r>
+          </a:p>
+        </p:txBody>
+      </p:sp>
+    </p:spTree>
+    <p:extLst>
+      <p:ext uri="{BB962C8B-B14F-4D97-AF65-F5344CB8AC3E}">
+        <p14:creationId xmlns:p14="http://schemas.microsoft.com/office/powerpoint/2010/main" val="3593415306"/>
+      </p:ext>
+    </p:extLst>
+  </p:cSld>
+  <p:clrMapOvr>
+    <a:masterClrMapping/>
+  </p:clrMapOvr>
+</p:sld>
+</file>
+
+<file path=ppt/slides/slide10.xml><?xml version="1.0" encoding="utf-8"?>
+<p:sld xmlns:a="http://schemas.openxmlformats.org/drawingml/2006/main" xmlns:r="http://schemas.openxmlformats.org/officeDocument/2006/relationships" xmlns:p="http://schemas.openxmlformats.org/presentationml/2006/main">
+  <p:cSld>
+    <p:spTree>
+      <p:nvGrpSpPr>
+        <p:cNvPr id="1" name=""/>
+        <p:cNvGrpSpPr/>
+        <p:nvPr/>
+      </p:nvGrpSpPr>
+      <p:grpSpPr>
+        <a:xfrm>
+          <a:off x="0" y="0"/>
+          <a:ext cx="0" cy="0"/>
+          <a:chOff x="0" y="0"/>
+          <a:chExt cx="0" cy="0"/>
+        </a:xfrm>
+      </p:grpSpPr>
       <p:pic>
         <p:nvPicPr>
           <p:cNvPr id="5" name="그림 4">
             <a:extLst>
               <a:ext uri="{FF2B5EF4-FFF2-40B4-BE49-F238E27FC236}">
-                <a16:creationId xmlns:a16="http://schemas.microsoft.com/office/drawing/2014/main" xmlns="" id="{047A93DD-34B2-1536-18EB-42554C35B86F}"/>
+                <a16:creationId xmlns:a16="http://schemas.microsoft.com/office/drawing/2014/main" id="{C733E112-C8E7-8E68-FFDC-DE3C3B4F1018}"/>
               </a:ext>
             </a:extLst>
           </p:cNvPr>
@@ -3344,8 +3445,8 @@
         </p:blipFill>
         <p:spPr>
           <a:xfrm>
-            <a:off x="667494" y="583766"/>
-            <a:ext cx="8377633" cy="2845234"/>
+            <a:off x="246965" y="935128"/>
+            <a:ext cx="3839842" cy="2493872"/>
           </a:xfrm>
           <a:prstGeom prst="rect">
             <a:avLst/>
@@ -3354,376 +3455,180 @@
       </p:pic>
       <p:sp>
         <p:nvSpPr>
-          <p:cNvPr id="6" name="직사각형 5">
-            <a:extLst>
-              <a:ext uri="{FF2B5EF4-FFF2-40B4-BE49-F238E27FC236}">
-                <a16:creationId xmlns:a16="http://schemas.microsoft.com/office/drawing/2014/main" xmlns="" id="{027A7B5A-4064-637D-5731-5F43721674D3}"/>
-              </a:ext>
-            </a:extLst>
-          </p:cNvPr>
-          <p:cNvSpPr/>
-          <p:nvPr/>
-        </p:nvSpPr>
-        <p:spPr>
-          <a:xfrm>
-            <a:off x="1466722" y="540048"/>
-            <a:ext cx="2049729" cy="362078"/>
+          <p:cNvPr id="9" name="TextBox 8">
+            <a:extLst>
+              <a:ext uri="{FF2B5EF4-FFF2-40B4-BE49-F238E27FC236}">
+                <a16:creationId xmlns:a16="http://schemas.microsoft.com/office/drawing/2014/main" id="{E8F6BBC3-D21F-A11E-2163-9F7E3F7EE487}"/>
+              </a:ext>
+            </a:extLst>
+          </p:cNvPr>
+          <p:cNvSpPr txBox="1"/>
+          <p:nvPr/>
+        </p:nvSpPr>
+        <p:spPr>
+          <a:xfrm>
+            <a:off x="246965" y="3429000"/>
+            <a:ext cx="1439818" cy="307777"/>
           </a:xfrm>
           <a:prstGeom prst="rect">
             <a:avLst/>
           </a:prstGeom>
           <a:noFill/>
-          <a:ln w="38100">
-            <a:solidFill>
-              <a:srgbClr val="FF0000"/>
-            </a:solidFill>
-          </a:ln>
-        </p:spPr>
-        <p:style>
-          <a:lnRef idx="2">
-            <a:schemeClr val="accent1">
-              <a:shade val="15000"/>
-            </a:schemeClr>
-          </a:lnRef>
-          <a:fillRef idx="1">
-            <a:schemeClr val="accent1"/>
-          </a:fillRef>
-          <a:effectRef idx="0">
-            <a:schemeClr val="accent1"/>
-          </a:effectRef>
-          <a:fontRef idx="minor">
-            <a:schemeClr val="lt1"/>
-          </a:fontRef>
-        </p:style>
-        <p:txBody>
-          <a:bodyPr rtlCol="0" anchor="ctr"/>
-          <a:lstStyle/>
-          <a:p>
-            <a:pPr algn="ctr"/>
-            <a:endParaRPr lang="ko-KR" altLang="en-US"/>
-          </a:p>
-        </p:txBody>
-      </p:sp>
-      <p:sp>
-        <p:nvSpPr>
-          <p:cNvPr id="8" name="직사각형 7">
-            <a:extLst>
-              <a:ext uri="{FF2B5EF4-FFF2-40B4-BE49-F238E27FC236}">
-                <a16:creationId xmlns:a16="http://schemas.microsoft.com/office/drawing/2014/main" xmlns="" id="{1439A115-EE2F-06C4-1611-95B75A9662C0}"/>
-              </a:ext>
-            </a:extLst>
-          </p:cNvPr>
-          <p:cNvSpPr/>
-          <p:nvPr/>
-        </p:nvSpPr>
-        <p:spPr>
-          <a:xfrm>
-            <a:off x="667494" y="2871052"/>
-            <a:ext cx="1290181" cy="301732"/>
+        </p:spPr>
+        <p:txBody>
+          <a:bodyPr wrap="none" rtlCol="0">
+            <a:spAutoFit/>
+          </a:bodyPr>
+          <a:lstStyle/>
+          <a:p>
+            <a:r>
+              <a:rPr lang="en-US" altLang="ko-KR" sz="1400" dirty="0"/>
+              <a:t>Claude code cli</a:t>
+            </a:r>
+            <a:endParaRPr lang="ko-KR" altLang="en-US" sz="1400" dirty="0"/>
+          </a:p>
+        </p:txBody>
+      </p:sp>
+      <p:sp>
+        <p:nvSpPr>
+          <p:cNvPr id="11" name="TextBox 10">
+            <a:extLst>
+              <a:ext uri="{FF2B5EF4-FFF2-40B4-BE49-F238E27FC236}">
+                <a16:creationId xmlns:a16="http://schemas.microsoft.com/office/drawing/2014/main" id="{E7F0792B-906B-14D0-0EB1-A4C80C1BEB34}"/>
+              </a:ext>
+            </a:extLst>
+          </p:cNvPr>
+          <p:cNvSpPr txBox="1"/>
+          <p:nvPr/>
+        </p:nvSpPr>
+        <p:spPr>
+          <a:xfrm>
+            <a:off x="4096165" y="3890903"/>
+            <a:ext cx="1109471" cy="307777"/>
           </a:xfrm>
           <a:prstGeom prst="rect">
             <a:avLst/>
           </a:prstGeom>
           <a:noFill/>
-          <a:ln w="38100">
-            <a:solidFill>
-              <a:srgbClr val="FF0000"/>
-            </a:solidFill>
-          </a:ln>
-        </p:spPr>
-        <p:style>
-          <a:lnRef idx="2">
-            <a:schemeClr val="accent1">
-              <a:shade val="15000"/>
-            </a:schemeClr>
-          </a:lnRef>
-          <a:fillRef idx="1">
-            <a:schemeClr val="accent1"/>
-          </a:fillRef>
-          <a:effectRef idx="0">
-            <a:schemeClr val="accent1"/>
-          </a:effectRef>
-          <a:fontRef idx="minor">
-            <a:schemeClr val="lt1"/>
-          </a:fontRef>
-        </p:style>
-        <p:txBody>
-          <a:bodyPr rtlCol="0" anchor="ctr"/>
-          <a:lstStyle/>
-          <a:p>
-            <a:pPr algn="ctr"/>
-            <a:endParaRPr lang="ko-KR" altLang="en-US"/>
-          </a:p>
-        </p:txBody>
-      </p:sp>
-      <p:sp>
-        <p:nvSpPr>
-          <p:cNvPr id="10" name="직사각형 9">
-            <a:extLst>
-              <a:ext uri="{FF2B5EF4-FFF2-40B4-BE49-F238E27FC236}">
-                <a16:creationId xmlns:a16="http://schemas.microsoft.com/office/drawing/2014/main" xmlns="" id="{D1CF7E3C-8078-6E03-92E8-F40147300660}"/>
-              </a:ext>
-            </a:extLst>
-          </p:cNvPr>
-          <p:cNvSpPr/>
-          <p:nvPr/>
-        </p:nvSpPr>
-        <p:spPr>
-          <a:xfrm>
-            <a:off x="8254148" y="1741860"/>
-            <a:ext cx="667900" cy="301732"/>
-          </a:xfrm>
-          <a:prstGeom prst="rect">
-            <a:avLst/>
-          </a:prstGeom>
-          <a:noFill/>
-          <a:ln w="38100">
-            <a:solidFill>
-              <a:srgbClr val="FF0000"/>
-            </a:solidFill>
-          </a:ln>
-        </p:spPr>
-        <p:style>
-          <a:lnRef idx="2">
-            <a:schemeClr val="accent1">
-              <a:shade val="15000"/>
-            </a:schemeClr>
-          </a:lnRef>
-          <a:fillRef idx="1">
-            <a:schemeClr val="accent1"/>
-          </a:fillRef>
-          <a:effectRef idx="0">
-            <a:schemeClr val="accent1"/>
-          </a:effectRef>
-          <a:fontRef idx="minor">
-            <a:schemeClr val="lt1"/>
-          </a:fontRef>
-        </p:style>
-        <p:txBody>
-          <a:bodyPr rtlCol="0" anchor="ctr"/>
-          <a:lstStyle/>
-          <a:p>
-            <a:pPr algn="ctr"/>
-            <a:endParaRPr lang="ko-KR" altLang="en-US"/>
+        </p:spPr>
+        <p:txBody>
+          <a:bodyPr wrap="none" rtlCol="0">
+            <a:spAutoFit/>
+          </a:bodyPr>
+          <a:lstStyle/>
+          <a:p>
+            <a:r>
+              <a:rPr lang="en-US" altLang="ko-KR" sz="1400" dirty="0"/>
+              <a:t>Power shell</a:t>
+            </a:r>
+            <a:endParaRPr lang="ko-KR" altLang="en-US" sz="1400" dirty="0"/>
           </a:p>
         </p:txBody>
       </p:sp>
       <p:pic>
         <p:nvPicPr>
-          <p:cNvPr id="7" name="Picture 2"/>
+          <p:cNvPr id="13" name="그림 12">
+            <a:extLst>
+              <a:ext uri="{FF2B5EF4-FFF2-40B4-BE49-F238E27FC236}">
+                <a16:creationId xmlns:a16="http://schemas.microsoft.com/office/drawing/2014/main" id="{CE9E41DA-899F-C013-07A9-9661CB184AFA}"/>
+              </a:ext>
+            </a:extLst>
+          </p:cNvPr>
           <p:cNvPicPr>
-            <a:picLocks noChangeAspect="1" noChangeArrowheads="1"/>
+            <a:picLocks noChangeAspect="1"/>
           </p:cNvPicPr>
           <p:nvPr/>
         </p:nvPicPr>
         <p:blipFill>
-          <a:blip r:embed="rId3">
-            <a:extLst>
-              <a:ext uri="{28A0092B-C50C-407E-A947-70E740481C1C}">
-                <a14:useLocalDpi xmlns:a14="http://schemas.microsoft.com/office/drawing/2010/main" val="0"/>
-              </a:ext>
-            </a:extLst>
-          </a:blip>
-          <a:srcRect/>
+          <a:blip r:embed="rId3"/>
           <a:stretch>
             <a:fillRect/>
           </a:stretch>
         </p:blipFill>
-        <p:spPr bwMode="auto">
-          <a:xfrm>
-            <a:off x="1312584" y="4622819"/>
-            <a:ext cx="1428750" cy="1076325"/>
+        <p:spPr>
+          <a:xfrm>
+            <a:off x="7986118" y="909650"/>
+            <a:ext cx="6249173" cy="6270285"/>
           </a:xfrm>
           <a:prstGeom prst="rect">
             <a:avLst/>
           </a:prstGeom>
+        </p:spPr>
+      </p:pic>
+      <p:sp>
+        <p:nvSpPr>
+          <p:cNvPr id="15" name="TextBox 14">
+            <a:extLst>
+              <a:ext uri="{FF2B5EF4-FFF2-40B4-BE49-F238E27FC236}">
+                <a16:creationId xmlns:a16="http://schemas.microsoft.com/office/drawing/2014/main" id="{D3DB8730-1DC6-7CF7-6E83-EE9895D23D80}"/>
+              </a:ext>
+            </a:extLst>
+          </p:cNvPr>
+          <p:cNvSpPr txBox="1"/>
+          <p:nvPr/>
+        </p:nvSpPr>
+        <p:spPr>
+          <a:xfrm>
+            <a:off x="8091637" y="6478968"/>
+            <a:ext cx="1600759" cy="307777"/>
+          </a:xfrm>
+          <a:prstGeom prst="rect">
+            <a:avLst/>
+          </a:prstGeom>
           <a:noFill/>
-          <a:ln>
-            <a:noFill/>
-          </a:ln>
-          <a:extLst>
-            <a:ext uri="{909E8E84-426E-40DD-AFC4-6F175D3DCCD1}">
-              <a14:hiddenFill xmlns:a14="http://schemas.microsoft.com/office/drawing/2010/main">
-                <a:solidFill>
-                  <a:schemeClr val="accent1"/>
-                </a:solidFill>
-              </a14:hiddenFill>
-            </a:ext>
-            <a:ext uri="{91240B29-F687-4F45-9708-019B960494DF}">
-              <a14:hiddenLine xmlns:a14="http://schemas.microsoft.com/office/drawing/2010/main" w="9525">
-                <a:solidFill>
-                  <a:schemeClr val="tx1"/>
-                </a:solidFill>
-                <a:miter lim="800000"/>
-                <a:headEnd/>
-                <a:tailEnd/>
-              </a14:hiddenLine>
-            </a:ext>
-          </a:extLst>
-        </p:spPr>
-      </p:pic>
+        </p:spPr>
+        <p:txBody>
+          <a:bodyPr wrap="none" rtlCol="0">
+            <a:spAutoFit/>
+          </a:bodyPr>
+          <a:lstStyle/>
+          <a:p>
+            <a:r>
+              <a:rPr lang="en-US" altLang="ko-KR" sz="1400" dirty="0"/>
+              <a:t>Codex in </a:t>
+            </a:r>
+            <a:r>
+              <a:rPr lang="en-US" altLang="ko-KR" sz="1400" dirty="0" err="1"/>
+              <a:t>VSCode</a:t>
+            </a:r>
+            <a:endParaRPr lang="ko-KR" altLang="en-US" sz="1400" dirty="0"/>
+          </a:p>
+        </p:txBody>
+      </p:sp>
       <p:pic>
         <p:nvPicPr>
-          <p:cNvPr id="2050" name="Picture 2"/>
+          <p:cNvPr id="17" name="그림 16">
+            <a:extLst>
+              <a:ext uri="{FF2B5EF4-FFF2-40B4-BE49-F238E27FC236}">
+                <a16:creationId xmlns:a16="http://schemas.microsoft.com/office/drawing/2014/main" id="{4DCE1742-3BFA-8EF1-5235-5E231D825C4B}"/>
+              </a:ext>
+            </a:extLst>
+          </p:cNvPr>
           <p:cNvPicPr>
-            <a:picLocks noChangeAspect="1" noChangeArrowheads="1"/>
+            <a:picLocks noChangeAspect="1"/>
           </p:cNvPicPr>
           <p:nvPr/>
         </p:nvPicPr>
         <p:blipFill>
-          <a:blip r:embed="rId4">
-            <a:extLst>
-              <a:ext uri="{28A0092B-C50C-407E-A947-70E740481C1C}">
-                <a14:useLocalDpi xmlns:a14="http://schemas.microsoft.com/office/drawing/2010/main" val="0"/>
-              </a:ext>
-            </a:extLst>
-          </a:blip>
-          <a:srcRect/>
+          <a:blip r:embed="rId4"/>
           <a:stretch>
             <a:fillRect/>
           </a:stretch>
         </p:blipFill>
-        <p:spPr bwMode="auto">
-          <a:xfrm>
-            <a:off x="5164455" y="4870412"/>
-            <a:ext cx="2228850" cy="1162050"/>
+        <p:spPr>
+          <a:xfrm>
+            <a:off x="4096165" y="909650"/>
+            <a:ext cx="3880595" cy="2925660"/>
           </a:xfrm>
           <a:prstGeom prst="rect">
             <a:avLst/>
           </a:prstGeom>
-          <a:noFill/>
-          <a:ln>
-            <a:noFill/>
-          </a:ln>
-          <a:extLst>
-            <a:ext uri="{909E8E84-426E-40DD-AFC4-6F175D3DCCD1}">
-              <a14:hiddenFill xmlns:a14="http://schemas.microsoft.com/office/drawing/2010/main">
-                <a:solidFill>
-                  <a:schemeClr val="accent1"/>
-                </a:solidFill>
-              </a14:hiddenFill>
-            </a:ext>
-            <a:ext uri="{91240B29-F687-4F45-9708-019B960494DF}">
-              <a14:hiddenLine xmlns:a14="http://schemas.microsoft.com/office/drawing/2010/main" w="9525">
-                <a:solidFill>
-                  <a:schemeClr val="tx1"/>
-                </a:solidFill>
-                <a:miter lim="800000"/>
-                <a:headEnd/>
-                <a:tailEnd/>
-              </a14:hiddenLine>
-            </a:ext>
-          </a:extLst>
         </p:spPr>
       </p:pic>
-      <p:sp>
-        <p:nvSpPr>
-          <p:cNvPr id="9" name="직사각형 8">
-            <a:extLst>
-              <a:ext uri="{FF2B5EF4-FFF2-40B4-BE49-F238E27FC236}">
-                <a16:creationId xmlns:a16="http://schemas.microsoft.com/office/drawing/2014/main" xmlns="" id="{1439A115-EE2F-06C4-1611-95B75A9662C0}"/>
-              </a:ext>
-            </a:extLst>
-          </p:cNvPr>
-          <p:cNvSpPr/>
-          <p:nvPr/>
-        </p:nvSpPr>
-        <p:spPr>
-          <a:xfrm>
-            <a:off x="1381868" y="5149705"/>
-            <a:ext cx="1290181" cy="301732"/>
-          </a:xfrm>
-          <a:prstGeom prst="rect">
-            <a:avLst/>
-          </a:prstGeom>
-          <a:noFill/>
-          <a:ln w="38100">
-            <a:solidFill>
-              <a:srgbClr val="FF0000"/>
-            </a:solidFill>
-          </a:ln>
-        </p:spPr>
-        <p:style>
-          <a:lnRef idx="2">
-            <a:schemeClr val="accent1">
-              <a:shade val="15000"/>
-            </a:schemeClr>
-          </a:lnRef>
-          <a:fillRef idx="1">
-            <a:schemeClr val="accent1"/>
-          </a:fillRef>
-          <a:effectRef idx="0">
-            <a:schemeClr val="accent1"/>
-          </a:effectRef>
-          <a:fontRef idx="minor">
-            <a:schemeClr val="lt1"/>
-          </a:fontRef>
-        </p:style>
-        <p:txBody>
-          <a:bodyPr rtlCol="0" anchor="ctr"/>
-          <a:lstStyle/>
-          <a:p>
-            <a:pPr algn="ctr"/>
-            <a:endParaRPr lang="ko-KR" altLang="en-US"/>
-          </a:p>
-        </p:txBody>
-      </p:sp>
-      <p:sp>
-        <p:nvSpPr>
-          <p:cNvPr id="11" name="직사각형 10">
-            <a:extLst>
-              <a:ext uri="{FF2B5EF4-FFF2-40B4-BE49-F238E27FC236}">
-                <a16:creationId xmlns:a16="http://schemas.microsoft.com/office/drawing/2014/main" xmlns="" id="{1439A115-EE2F-06C4-1611-95B75A9662C0}"/>
-              </a:ext>
-            </a:extLst>
-          </p:cNvPr>
-          <p:cNvSpPr/>
-          <p:nvPr/>
-        </p:nvSpPr>
-        <p:spPr>
-          <a:xfrm>
-            <a:off x="5164455" y="4847973"/>
-            <a:ext cx="2613324" cy="301732"/>
-          </a:xfrm>
-          <a:prstGeom prst="rect">
-            <a:avLst/>
-          </a:prstGeom>
-          <a:noFill/>
-          <a:ln w="38100">
-            <a:solidFill>
-              <a:srgbClr val="FF0000"/>
-            </a:solidFill>
-          </a:ln>
-        </p:spPr>
-        <p:style>
-          <a:lnRef idx="2">
-            <a:schemeClr val="accent1">
-              <a:shade val="15000"/>
-            </a:schemeClr>
-          </a:lnRef>
-          <a:fillRef idx="1">
-            <a:schemeClr val="accent1"/>
-          </a:fillRef>
-          <a:effectRef idx="0">
-            <a:schemeClr val="accent1"/>
-          </a:effectRef>
-          <a:fontRef idx="minor">
-            <a:schemeClr val="lt1"/>
-          </a:fontRef>
-        </p:style>
-        <p:txBody>
-          <a:bodyPr rtlCol="0" anchor="ctr"/>
-          <a:lstStyle/>
-          <a:p>
-            <a:pPr algn="ctr"/>
-            <a:endParaRPr lang="ko-KR" altLang="en-US"/>
-          </a:p>
-        </p:txBody>
-      </p:sp>
     </p:spTree>
     <p:extLst>
       <p:ext uri="{BB962C8B-B14F-4D97-AF65-F5344CB8AC3E}">
-        <p14:creationId xmlns:p14="http://schemas.microsoft.com/office/powerpoint/2010/main" val="3082572462"/>
+        <p14:creationId xmlns:p14="http://schemas.microsoft.com/office/powerpoint/2010/main" val="3705094321"/>
       </p:ext>
     </p:extLst>
   </p:cSld>
@@ -3752,14 +3657,2532 @@
       </p:grpSpPr>
       <p:pic>
         <p:nvPicPr>
-          <p:cNvPr id="1027" name="Picture 3"/>
+          <p:cNvPr id="29" name="그림 28">
+            <a:extLst>
+              <a:ext uri="{FF2B5EF4-FFF2-40B4-BE49-F238E27FC236}">
+                <a16:creationId xmlns:a16="http://schemas.microsoft.com/office/drawing/2014/main" id="{48536985-0830-B648-C9EE-345FBC11D438}"/>
+              </a:ext>
+            </a:extLst>
+          </p:cNvPr>
+          <p:cNvPicPr>
+            <a:picLocks noChangeAspect="1"/>
+          </p:cNvPicPr>
+          <p:nvPr/>
+        </p:nvPicPr>
+        <p:blipFill>
+          <a:blip r:embed="rId2"/>
+          <a:stretch>
+            <a:fillRect/>
+          </a:stretch>
+        </p:blipFill>
+        <p:spPr>
+          <a:xfrm>
+            <a:off x="5174682" y="2153667"/>
+            <a:ext cx="6337074" cy="3427854"/>
+          </a:xfrm>
+          <a:prstGeom prst="rect">
+            <a:avLst/>
+          </a:prstGeom>
+        </p:spPr>
+      </p:pic>
+      <p:pic>
+        <p:nvPicPr>
+          <p:cNvPr id="11" name="그림 10">
+            <a:extLst>
+              <a:ext uri="{FF2B5EF4-FFF2-40B4-BE49-F238E27FC236}">
+                <a16:creationId xmlns:a16="http://schemas.microsoft.com/office/drawing/2014/main" id="{AE850C68-F369-70C1-6F94-2616AE04FC48}"/>
+              </a:ext>
+            </a:extLst>
+          </p:cNvPr>
+          <p:cNvPicPr>
+            <a:picLocks noChangeAspect="1"/>
+          </p:cNvPicPr>
+          <p:nvPr/>
+        </p:nvPicPr>
+        <p:blipFill>
+          <a:blip r:embed="rId3"/>
+          <a:stretch>
+            <a:fillRect/>
+          </a:stretch>
+        </p:blipFill>
+        <p:spPr>
+          <a:xfrm>
+            <a:off x="397366" y="903556"/>
+            <a:ext cx="4536712" cy="2318210"/>
+          </a:xfrm>
+          <a:prstGeom prst="rect">
+            <a:avLst/>
+          </a:prstGeom>
+        </p:spPr>
+      </p:pic>
+      <p:sp>
+        <p:nvSpPr>
+          <p:cNvPr id="5" name="TextBox 4">
+            <a:extLst>
+              <a:ext uri="{FF2B5EF4-FFF2-40B4-BE49-F238E27FC236}">
+                <a16:creationId xmlns:a16="http://schemas.microsoft.com/office/drawing/2014/main" id="{3A2ED2A9-EC9C-EFBE-898D-A62BB6C26E4D}"/>
+              </a:ext>
+            </a:extLst>
+          </p:cNvPr>
+          <p:cNvSpPr txBox="1"/>
+          <p:nvPr/>
+        </p:nvSpPr>
+        <p:spPr>
+          <a:xfrm>
+            <a:off x="397366" y="294013"/>
+            <a:ext cx="6097022" cy="369332"/>
+          </a:xfrm>
+          <a:prstGeom prst="rect">
+            <a:avLst/>
+          </a:prstGeom>
+          <a:noFill/>
+        </p:spPr>
+        <p:txBody>
+          <a:bodyPr wrap="square">
+            <a:spAutoFit/>
+          </a:bodyPr>
+          <a:lstStyle/>
+          <a:p>
+            <a:r>
+              <a:rPr lang="ko-KR" altLang="en-US" dirty="0"/>
+              <a:t>https://github.com/Rhpark/DoorayForDev</a:t>
+            </a:r>
+          </a:p>
+        </p:txBody>
+      </p:sp>
+      <p:sp>
+        <p:nvSpPr>
+          <p:cNvPr id="9" name="직사각형 8">
+            <a:extLst>
+              <a:ext uri="{FF2B5EF4-FFF2-40B4-BE49-F238E27FC236}">
+                <a16:creationId xmlns:a16="http://schemas.microsoft.com/office/drawing/2014/main" id="{5BBA2A58-360C-763D-C393-4D67E316BE7E}"/>
+              </a:ext>
+            </a:extLst>
+          </p:cNvPr>
+          <p:cNvSpPr/>
+          <p:nvPr/>
+        </p:nvSpPr>
+        <p:spPr>
+          <a:xfrm>
+            <a:off x="4428358" y="1601735"/>
+            <a:ext cx="587373" cy="282297"/>
+          </a:xfrm>
+          <a:prstGeom prst="rect">
+            <a:avLst/>
+          </a:prstGeom>
+          <a:noFill/>
+          <a:ln w="38100">
+            <a:solidFill>
+              <a:srgbClr val="FF0000"/>
+            </a:solidFill>
+          </a:ln>
+        </p:spPr>
+        <p:style>
+          <a:lnRef idx="2">
+            <a:schemeClr val="accent1">
+              <a:shade val="15000"/>
+            </a:schemeClr>
+          </a:lnRef>
+          <a:fillRef idx="1">
+            <a:schemeClr val="accent1"/>
+          </a:fillRef>
+          <a:effectRef idx="0">
+            <a:schemeClr val="accent1"/>
+          </a:effectRef>
+          <a:fontRef idx="minor">
+            <a:schemeClr val="lt1"/>
+          </a:fontRef>
+        </p:style>
+        <p:txBody>
+          <a:bodyPr rtlCol="0" anchor="ctr"/>
+          <a:lstStyle/>
+          <a:p>
+            <a:pPr algn="ctr"/>
+            <a:endParaRPr lang="ko-KR" altLang="en-US"/>
+          </a:p>
+        </p:txBody>
+      </p:sp>
+      <p:sp>
+        <p:nvSpPr>
+          <p:cNvPr id="13" name="직사각형 12">
+            <a:extLst>
+              <a:ext uri="{FF2B5EF4-FFF2-40B4-BE49-F238E27FC236}">
+                <a16:creationId xmlns:a16="http://schemas.microsoft.com/office/drawing/2014/main" id="{ADA03CC2-F8B2-92D1-B820-77295000198C}"/>
+              </a:ext>
+            </a:extLst>
+          </p:cNvPr>
+          <p:cNvSpPr/>
+          <p:nvPr/>
+        </p:nvSpPr>
+        <p:spPr>
+          <a:xfrm>
+            <a:off x="3310417" y="2985994"/>
+            <a:ext cx="764321" cy="235866"/>
+          </a:xfrm>
+          <a:prstGeom prst="rect">
+            <a:avLst/>
+          </a:prstGeom>
+          <a:noFill/>
+          <a:ln w="38100">
+            <a:solidFill>
+              <a:srgbClr val="FF0000"/>
+            </a:solidFill>
+          </a:ln>
+        </p:spPr>
+        <p:style>
+          <a:lnRef idx="2">
+            <a:schemeClr val="accent1">
+              <a:shade val="15000"/>
+            </a:schemeClr>
+          </a:lnRef>
+          <a:fillRef idx="1">
+            <a:schemeClr val="accent1"/>
+          </a:fillRef>
+          <a:effectRef idx="0">
+            <a:schemeClr val="accent1"/>
+          </a:effectRef>
+          <a:fontRef idx="minor">
+            <a:schemeClr val="lt1"/>
+          </a:fontRef>
+        </p:style>
+        <p:txBody>
+          <a:bodyPr rtlCol="0" anchor="ctr"/>
+          <a:lstStyle/>
+          <a:p>
+            <a:pPr algn="ctr"/>
+            <a:endParaRPr lang="ko-KR" altLang="en-US"/>
+          </a:p>
+        </p:txBody>
+      </p:sp>
+      <p:cxnSp>
+        <p:nvCxnSpPr>
+          <p:cNvPr id="14" name="연결선: 꺾임 13">
+            <a:extLst>
+              <a:ext uri="{FF2B5EF4-FFF2-40B4-BE49-F238E27FC236}">
+                <a16:creationId xmlns:a16="http://schemas.microsoft.com/office/drawing/2014/main" id="{83C06CF1-EB56-ACFF-E0CD-62D58B7C2A25}"/>
+              </a:ext>
+            </a:extLst>
+          </p:cNvPr>
+          <p:cNvCxnSpPr>
+            <a:cxnSpLocks/>
+            <a:stCxn id="9" idx="2"/>
+            <a:endCxn id="13" idx="3"/>
+          </p:cNvCxnSpPr>
+          <p:nvPr/>
+        </p:nvCxnSpPr>
+        <p:spPr>
+          <a:xfrm rot="5400000">
+            <a:off x="3788445" y="2170326"/>
+            <a:ext cx="1219895" cy="647307"/>
+          </a:xfrm>
+          <a:prstGeom prst="bentConnector2">
+            <a:avLst/>
+          </a:prstGeom>
+          <a:ln w="38100">
+            <a:solidFill>
+              <a:srgbClr val="FF0000"/>
+            </a:solidFill>
+            <a:tailEnd type="triangle"/>
+          </a:ln>
+        </p:spPr>
+        <p:style>
+          <a:lnRef idx="2">
+            <a:schemeClr val="accent1"/>
+          </a:lnRef>
+          <a:fillRef idx="0">
+            <a:schemeClr val="accent1"/>
+          </a:fillRef>
+          <a:effectRef idx="1">
+            <a:schemeClr val="accent1"/>
+          </a:effectRef>
+          <a:fontRef idx="minor">
+            <a:schemeClr val="tx1"/>
+          </a:fontRef>
+        </p:style>
+      </p:cxnSp>
+      <p:sp>
+        <p:nvSpPr>
+          <p:cNvPr id="23" name="직사각형 22">
+            <a:extLst>
+              <a:ext uri="{FF2B5EF4-FFF2-40B4-BE49-F238E27FC236}">
+                <a16:creationId xmlns:a16="http://schemas.microsoft.com/office/drawing/2014/main" id="{77025781-91E5-7ADC-60BF-91CE836EE5A0}"/>
+              </a:ext>
+            </a:extLst>
+          </p:cNvPr>
+          <p:cNvSpPr/>
+          <p:nvPr/>
+        </p:nvSpPr>
+        <p:spPr>
+          <a:xfrm>
+            <a:off x="7676914" y="5136596"/>
+            <a:ext cx="587373" cy="380489"/>
+          </a:xfrm>
+          <a:prstGeom prst="rect">
+            <a:avLst/>
+          </a:prstGeom>
+          <a:noFill/>
+          <a:ln w="38100">
+            <a:solidFill>
+              <a:srgbClr val="FF0000"/>
+            </a:solidFill>
+          </a:ln>
+        </p:spPr>
+        <p:style>
+          <a:lnRef idx="2">
+            <a:schemeClr val="accent1">
+              <a:shade val="15000"/>
+            </a:schemeClr>
+          </a:lnRef>
+          <a:fillRef idx="1">
+            <a:schemeClr val="accent1"/>
+          </a:fillRef>
+          <a:effectRef idx="0">
+            <a:schemeClr val="accent1"/>
+          </a:effectRef>
+          <a:fontRef idx="minor">
+            <a:schemeClr val="lt1"/>
+          </a:fontRef>
+        </p:style>
+        <p:txBody>
+          <a:bodyPr rtlCol="0" anchor="ctr"/>
+          <a:lstStyle/>
+          <a:p>
+            <a:pPr algn="ctr"/>
+            <a:endParaRPr lang="ko-KR" altLang="en-US"/>
+          </a:p>
+        </p:txBody>
+      </p:sp>
+      <p:sp>
+        <p:nvSpPr>
+          <p:cNvPr id="25" name="직사각형 24">
+            <a:extLst>
+              <a:ext uri="{FF2B5EF4-FFF2-40B4-BE49-F238E27FC236}">
+                <a16:creationId xmlns:a16="http://schemas.microsoft.com/office/drawing/2014/main" id="{5F00B889-C707-3743-A310-A345CAF33C79}"/>
+              </a:ext>
+            </a:extLst>
+          </p:cNvPr>
+          <p:cNvSpPr/>
+          <p:nvPr/>
+        </p:nvSpPr>
+        <p:spPr>
+          <a:xfrm>
+            <a:off x="7676914" y="3921487"/>
+            <a:ext cx="877941" cy="472543"/>
+          </a:xfrm>
+          <a:prstGeom prst="rect">
+            <a:avLst/>
+          </a:prstGeom>
+          <a:noFill/>
+          <a:ln w="38100">
+            <a:solidFill>
+              <a:srgbClr val="FF0000"/>
+            </a:solidFill>
+          </a:ln>
+        </p:spPr>
+        <p:style>
+          <a:lnRef idx="2">
+            <a:schemeClr val="accent1">
+              <a:shade val="15000"/>
+            </a:schemeClr>
+          </a:lnRef>
+          <a:fillRef idx="1">
+            <a:schemeClr val="accent1"/>
+          </a:fillRef>
+          <a:effectRef idx="0">
+            <a:schemeClr val="accent1"/>
+          </a:effectRef>
+          <a:fontRef idx="minor">
+            <a:schemeClr val="lt1"/>
+          </a:fontRef>
+        </p:style>
+        <p:txBody>
+          <a:bodyPr rtlCol="0" anchor="ctr"/>
+          <a:lstStyle/>
+          <a:p>
+            <a:pPr algn="ctr"/>
+            <a:endParaRPr lang="ko-KR" altLang="en-US"/>
+          </a:p>
+        </p:txBody>
+      </p:sp>
+      <p:sp>
+        <p:nvSpPr>
+          <p:cNvPr id="27" name="TextBox 26">
+            <a:extLst>
+              <a:ext uri="{FF2B5EF4-FFF2-40B4-BE49-F238E27FC236}">
+                <a16:creationId xmlns:a16="http://schemas.microsoft.com/office/drawing/2014/main" id="{E254F412-A150-B7EB-7138-4E356AF7897A}"/>
+              </a:ext>
+            </a:extLst>
+          </p:cNvPr>
+          <p:cNvSpPr txBox="1"/>
+          <p:nvPr/>
+        </p:nvSpPr>
+        <p:spPr>
+          <a:xfrm>
+            <a:off x="5970312" y="4811472"/>
+            <a:ext cx="1430381" cy="307777"/>
+          </a:xfrm>
+          <a:prstGeom prst="rect">
+            <a:avLst/>
+          </a:prstGeom>
+          <a:noFill/>
+        </p:spPr>
+        <p:txBody>
+          <a:bodyPr wrap="square">
+            <a:spAutoFit/>
+          </a:bodyPr>
+          <a:lstStyle/>
+          <a:p>
+            <a:r>
+              <a:rPr lang="ko-KR" altLang="en-US" sz="1400" dirty="0"/>
+              <a:t>필수</a:t>
+            </a:r>
+            <a:r>
+              <a:rPr lang="en-US" altLang="ko-KR" sz="1400" dirty="0"/>
+              <a:t> </a:t>
+            </a:r>
+            <a:r>
+              <a:rPr lang="ko-KR" altLang="en-US" sz="1400" dirty="0"/>
+              <a:t>자료</a:t>
+            </a:r>
+          </a:p>
+        </p:txBody>
+      </p:sp>
+      <p:sp>
+        <p:nvSpPr>
+          <p:cNvPr id="31" name="직사각형 30">
+            <a:extLst>
+              <a:ext uri="{FF2B5EF4-FFF2-40B4-BE49-F238E27FC236}">
+                <a16:creationId xmlns:a16="http://schemas.microsoft.com/office/drawing/2014/main" id="{92E34A58-0B07-5219-F6C7-EBF4EAF5D1BE}"/>
+              </a:ext>
+            </a:extLst>
+          </p:cNvPr>
+          <p:cNvSpPr/>
+          <p:nvPr/>
+        </p:nvSpPr>
+        <p:spPr>
+          <a:xfrm>
+            <a:off x="7676913" y="4828144"/>
+            <a:ext cx="877941" cy="268705"/>
+          </a:xfrm>
+          <a:prstGeom prst="rect">
+            <a:avLst/>
+          </a:prstGeom>
+          <a:noFill/>
+          <a:ln w="38100">
+            <a:solidFill>
+              <a:srgbClr val="FF0000"/>
+            </a:solidFill>
+          </a:ln>
+        </p:spPr>
+        <p:style>
+          <a:lnRef idx="2">
+            <a:schemeClr val="accent1">
+              <a:shade val="15000"/>
+            </a:schemeClr>
+          </a:lnRef>
+          <a:fillRef idx="1">
+            <a:schemeClr val="accent1"/>
+          </a:fillRef>
+          <a:effectRef idx="0">
+            <a:schemeClr val="accent1"/>
+          </a:effectRef>
+          <a:fontRef idx="minor">
+            <a:schemeClr val="lt1"/>
+          </a:fontRef>
+        </p:style>
+        <p:txBody>
+          <a:bodyPr rtlCol="0" anchor="ctr"/>
+          <a:lstStyle/>
+          <a:p>
+            <a:pPr algn="ctr"/>
+            <a:endParaRPr lang="ko-KR" altLang="en-US"/>
+          </a:p>
+        </p:txBody>
+      </p:sp>
+      <p:sp>
+        <p:nvSpPr>
+          <p:cNvPr id="33" name="TextBox 32">
+            <a:extLst>
+              <a:ext uri="{FF2B5EF4-FFF2-40B4-BE49-F238E27FC236}">
+                <a16:creationId xmlns:a16="http://schemas.microsoft.com/office/drawing/2014/main" id="{EC85CA86-FCEB-ED00-F84C-C42DC6DE2AD6}"/>
+              </a:ext>
+            </a:extLst>
+          </p:cNvPr>
+          <p:cNvSpPr txBox="1"/>
+          <p:nvPr/>
+        </p:nvSpPr>
+        <p:spPr>
+          <a:xfrm>
+            <a:off x="8713240" y="4716493"/>
+            <a:ext cx="1302202" cy="307777"/>
+          </a:xfrm>
+          <a:prstGeom prst="rect">
+            <a:avLst/>
+          </a:prstGeom>
+          <a:noFill/>
+        </p:spPr>
+        <p:txBody>
+          <a:bodyPr wrap="square">
+            <a:spAutoFit/>
+          </a:bodyPr>
+          <a:lstStyle/>
+          <a:p>
+            <a:r>
+              <a:rPr lang="en-US" altLang="ko-KR" sz="1400" dirty="0"/>
+              <a:t>AI  </a:t>
+            </a:r>
+            <a:r>
+              <a:rPr lang="ko-KR" altLang="en-US" sz="1400" dirty="0"/>
+              <a:t>협업용</a:t>
+            </a:r>
+          </a:p>
+        </p:txBody>
+      </p:sp>
+      <p:cxnSp>
+        <p:nvCxnSpPr>
+          <p:cNvPr id="37" name="직선 화살표 연결선 36">
+            <a:extLst>
+              <a:ext uri="{FF2B5EF4-FFF2-40B4-BE49-F238E27FC236}">
+                <a16:creationId xmlns:a16="http://schemas.microsoft.com/office/drawing/2014/main" id="{0425CB68-B578-270A-96E2-3C6811FE19E6}"/>
+              </a:ext>
+            </a:extLst>
+          </p:cNvPr>
+          <p:cNvCxnSpPr>
+            <a:cxnSpLocks/>
+            <a:stCxn id="31" idx="1"/>
+          </p:cNvCxnSpPr>
+          <p:nvPr/>
+        </p:nvCxnSpPr>
+        <p:spPr>
+          <a:xfrm flipH="1">
+            <a:off x="7006639" y="4962497"/>
+            <a:ext cx="670274" cy="30331"/>
+          </a:xfrm>
+          <a:prstGeom prst="straightConnector1">
+            <a:avLst/>
+          </a:prstGeom>
+          <a:ln w="38100">
+            <a:solidFill>
+              <a:srgbClr val="FF0000"/>
+            </a:solidFill>
+            <a:tailEnd type="triangle"/>
+          </a:ln>
+        </p:spPr>
+        <p:style>
+          <a:lnRef idx="2">
+            <a:schemeClr val="accent1"/>
+          </a:lnRef>
+          <a:fillRef idx="0">
+            <a:schemeClr val="accent1"/>
+          </a:fillRef>
+          <a:effectRef idx="1">
+            <a:schemeClr val="accent1"/>
+          </a:effectRef>
+          <a:fontRef idx="minor">
+            <a:schemeClr val="tx1"/>
+          </a:fontRef>
+        </p:style>
+      </p:cxnSp>
+      <p:cxnSp>
+        <p:nvCxnSpPr>
+          <p:cNvPr id="46" name="연결선: 꺾임 45">
+            <a:extLst>
+              <a:ext uri="{FF2B5EF4-FFF2-40B4-BE49-F238E27FC236}">
+                <a16:creationId xmlns:a16="http://schemas.microsoft.com/office/drawing/2014/main" id="{D99A26BC-186B-FE55-B795-36157EA4459F}"/>
+              </a:ext>
+            </a:extLst>
+          </p:cNvPr>
+          <p:cNvCxnSpPr>
+            <a:cxnSpLocks/>
+            <a:stCxn id="25" idx="3"/>
+            <a:endCxn id="33" idx="0"/>
+          </p:cNvCxnSpPr>
+          <p:nvPr/>
+        </p:nvCxnSpPr>
+        <p:spPr>
+          <a:xfrm>
+            <a:off x="8554855" y="4157759"/>
+            <a:ext cx="809486" cy="558734"/>
+          </a:xfrm>
+          <a:prstGeom prst="bentConnector2">
+            <a:avLst/>
+          </a:prstGeom>
+          <a:ln w="38100">
+            <a:solidFill>
+              <a:srgbClr val="FF0000"/>
+            </a:solidFill>
+            <a:tailEnd type="triangle"/>
+          </a:ln>
+        </p:spPr>
+        <p:style>
+          <a:lnRef idx="2">
+            <a:schemeClr val="accent1"/>
+          </a:lnRef>
+          <a:fillRef idx="0">
+            <a:schemeClr val="accent1"/>
+          </a:fillRef>
+          <a:effectRef idx="1">
+            <a:schemeClr val="accent1"/>
+          </a:effectRef>
+          <a:fontRef idx="minor">
+            <a:schemeClr val="tx1"/>
+          </a:fontRef>
+        </p:style>
+      </p:cxnSp>
+      <p:cxnSp>
+        <p:nvCxnSpPr>
+          <p:cNvPr id="51" name="연결선: 꺾임 50">
+            <a:extLst>
+              <a:ext uri="{FF2B5EF4-FFF2-40B4-BE49-F238E27FC236}">
+                <a16:creationId xmlns:a16="http://schemas.microsoft.com/office/drawing/2014/main" id="{C6378B72-F318-BD26-41E3-510A4D2604FA}"/>
+              </a:ext>
+            </a:extLst>
+          </p:cNvPr>
+          <p:cNvCxnSpPr>
+            <a:cxnSpLocks/>
+            <a:stCxn id="23" idx="3"/>
+            <a:endCxn id="33" idx="2"/>
+          </p:cNvCxnSpPr>
+          <p:nvPr/>
+        </p:nvCxnSpPr>
+        <p:spPr>
+          <a:xfrm flipV="1">
+            <a:off x="8264287" y="5024270"/>
+            <a:ext cx="1100054" cy="302571"/>
+          </a:xfrm>
+          <a:prstGeom prst="bentConnector2">
+            <a:avLst/>
+          </a:prstGeom>
+          <a:ln w="38100">
+            <a:solidFill>
+              <a:srgbClr val="FF0000"/>
+            </a:solidFill>
+            <a:tailEnd type="triangle"/>
+          </a:ln>
+        </p:spPr>
+        <p:style>
+          <a:lnRef idx="2">
+            <a:schemeClr val="accent1"/>
+          </a:lnRef>
+          <a:fillRef idx="0">
+            <a:schemeClr val="accent1"/>
+          </a:fillRef>
+          <a:effectRef idx="1">
+            <a:schemeClr val="accent1"/>
+          </a:effectRef>
+          <a:fontRef idx="minor">
+            <a:schemeClr val="tx1"/>
+          </a:fontRef>
+        </p:style>
+      </p:cxnSp>
+    </p:spTree>
+    <p:extLst>
+      <p:ext uri="{BB962C8B-B14F-4D97-AF65-F5344CB8AC3E}">
+        <p14:creationId xmlns:p14="http://schemas.microsoft.com/office/powerpoint/2010/main" val="3420230637"/>
+      </p:ext>
+    </p:extLst>
+  </p:cSld>
+  <p:clrMapOvr>
+    <a:masterClrMapping/>
+  </p:clrMapOvr>
+</p:sld>
+</file>
+
+<file path=ppt/slides/slide3.xml><?xml version="1.0" encoding="utf-8"?>
+<p:sld xmlns:a="http://schemas.openxmlformats.org/drawingml/2006/main" xmlns:r="http://schemas.openxmlformats.org/officeDocument/2006/relationships" xmlns:p="http://schemas.openxmlformats.org/presentationml/2006/main">
+  <p:cSld>
+    <p:spTree>
+      <p:nvGrpSpPr>
+        <p:cNvPr id="1" name=""/>
+        <p:cNvGrpSpPr/>
+        <p:nvPr/>
+      </p:nvGrpSpPr>
+      <p:grpSpPr>
+        <a:xfrm>
+          <a:off x="0" y="0"/>
+          <a:ext cx="0" cy="0"/>
+          <a:chOff x="0" y="0"/>
+          <a:chExt cx="0" cy="0"/>
+        </a:xfrm>
+      </p:grpSpPr>
+      <p:pic>
+        <p:nvPicPr>
+          <p:cNvPr id="5" name="그림 4">
+            <a:extLst>
+              <a:ext uri="{FF2B5EF4-FFF2-40B4-BE49-F238E27FC236}">
+                <a16:creationId xmlns:a16="http://schemas.microsoft.com/office/drawing/2014/main" id="{672BAA5B-7E3B-C296-1691-2E14E13E2D59}"/>
+              </a:ext>
+            </a:extLst>
+          </p:cNvPr>
+          <p:cNvPicPr>
+            <a:picLocks noChangeAspect="1"/>
+          </p:cNvPicPr>
+          <p:nvPr/>
+        </p:nvPicPr>
+        <p:blipFill>
+          <a:blip r:embed="rId2"/>
+          <a:stretch>
+            <a:fillRect/>
+          </a:stretch>
+        </p:blipFill>
+        <p:spPr>
+          <a:xfrm>
+            <a:off x="277340" y="1101095"/>
+            <a:ext cx="6337074" cy="3427854"/>
+          </a:xfrm>
+          <a:prstGeom prst="rect">
+            <a:avLst/>
+          </a:prstGeom>
+        </p:spPr>
+      </p:pic>
+      <p:grpSp>
+        <p:nvGrpSpPr>
+          <p:cNvPr id="19" name="그룹 18">
+            <a:extLst>
+              <a:ext uri="{FF2B5EF4-FFF2-40B4-BE49-F238E27FC236}">
+                <a16:creationId xmlns:a16="http://schemas.microsoft.com/office/drawing/2014/main" id="{3D986C50-8D88-CEA8-B117-6919443BB37F}"/>
+              </a:ext>
+            </a:extLst>
+          </p:cNvPr>
+          <p:cNvGrpSpPr/>
+          <p:nvPr/>
+        </p:nvGrpSpPr>
+        <p:grpSpPr>
+          <a:xfrm>
+            <a:off x="6976187" y="-47143"/>
+            <a:ext cx="4490443" cy="6858000"/>
+            <a:chOff x="6976187" y="-47143"/>
+            <a:chExt cx="4490443" cy="6858000"/>
+          </a:xfrm>
+        </p:grpSpPr>
+        <p:pic>
+          <p:nvPicPr>
+            <p:cNvPr id="7" name="그림 6">
+              <a:extLst>
+                <a:ext uri="{FF2B5EF4-FFF2-40B4-BE49-F238E27FC236}">
+                  <a16:creationId xmlns:a16="http://schemas.microsoft.com/office/drawing/2014/main" id="{00F99438-70BF-ED11-2A0C-7375DFC1EAEB}"/>
+                </a:ext>
+              </a:extLst>
+            </p:cNvPr>
+            <p:cNvPicPr>
+              <a:picLocks noChangeAspect="1"/>
+            </p:cNvPicPr>
+            <p:nvPr/>
+          </p:nvPicPr>
+          <p:blipFill>
+            <a:blip r:embed="rId3"/>
+            <a:stretch>
+              <a:fillRect/>
+            </a:stretch>
+          </p:blipFill>
+          <p:spPr>
+            <a:xfrm>
+              <a:off x="6976187" y="-47143"/>
+              <a:ext cx="4490443" cy="6858000"/>
+            </a:xfrm>
+            <a:prstGeom prst="rect">
+              <a:avLst/>
+            </a:prstGeom>
+          </p:spPr>
+        </p:pic>
+        <p:sp>
+          <p:nvSpPr>
+            <p:cNvPr id="8" name="직사각형 7">
+              <a:extLst>
+                <a:ext uri="{FF2B5EF4-FFF2-40B4-BE49-F238E27FC236}">
+                  <a16:creationId xmlns:a16="http://schemas.microsoft.com/office/drawing/2014/main" id="{2189CBE0-4A97-C9CC-F406-4221E9518354}"/>
+                </a:ext>
+              </a:extLst>
+            </p:cNvPr>
+            <p:cNvSpPr/>
+            <p:nvPr/>
+          </p:nvSpPr>
+          <p:spPr>
+            <a:xfrm>
+              <a:off x="7079673" y="872836"/>
+              <a:ext cx="1350818" cy="1565564"/>
+            </a:xfrm>
+            <a:prstGeom prst="rect">
+              <a:avLst/>
+            </a:prstGeom>
+          </p:spPr>
+          <p:style>
+            <a:lnRef idx="2">
+              <a:schemeClr val="accent1">
+                <a:shade val="15000"/>
+              </a:schemeClr>
+            </a:lnRef>
+            <a:fillRef idx="1">
+              <a:schemeClr val="accent1"/>
+            </a:fillRef>
+            <a:effectRef idx="0">
+              <a:schemeClr val="accent1"/>
+            </a:effectRef>
+            <a:fontRef idx="minor">
+              <a:schemeClr val="lt1"/>
+            </a:fontRef>
+          </p:style>
+          <p:txBody>
+            <a:bodyPr rtlCol="0" anchor="ctr"/>
+            <a:lstStyle/>
+            <a:p>
+              <a:pPr algn="ctr"/>
+              <a:endParaRPr lang="ko-KR" altLang="en-US"/>
+            </a:p>
+          </p:txBody>
+        </p:sp>
+        <p:sp>
+          <p:nvSpPr>
+            <p:cNvPr id="10" name="직사각형 9">
+              <a:extLst>
+                <a:ext uri="{FF2B5EF4-FFF2-40B4-BE49-F238E27FC236}">
+                  <a16:creationId xmlns:a16="http://schemas.microsoft.com/office/drawing/2014/main" id="{AC628F33-3FD5-D9C7-50B1-924B0A00EDDC}"/>
+                </a:ext>
+              </a:extLst>
+            </p:cNvPr>
+            <p:cNvSpPr/>
+            <p:nvPr/>
+          </p:nvSpPr>
+          <p:spPr>
+            <a:xfrm>
+              <a:off x="7079673" y="2694476"/>
+              <a:ext cx="1350818" cy="4031580"/>
+            </a:xfrm>
+            <a:prstGeom prst="rect">
+              <a:avLst/>
+            </a:prstGeom>
+          </p:spPr>
+          <p:style>
+            <a:lnRef idx="2">
+              <a:schemeClr val="accent1">
+                <a:shade val="15000"/>
+              </a:schemeClr>
+            </a:lnRef>
+            <a:fillRef idx="1">
+              <a:schemeClr val="accent1"/>
+            </a:fillRef>
+            <a:effectRef idx="0">
+              <a:schemeClr val="accent1"/>
+            </a:effectRef>
+            <a:fontRef idx="minor">
+              <a:schemeClr val="lt1"/>
+            </a:fontRef>
+          </p:style>
+          <p:txBody>
+            <a:bodyPr rtlCol="0" anchor="ctr"/>
+            <a:lstStyle/>
+            <a:p>
+              <a:pPr algn="ctr"/>
+              <a:endParaRPr lang="ko-KR" altLang="en-US"/>
+            </a:p>
+          </p:txBody>
+        </p:sp>
+      </p:grpSp>
+      <p:sp>
+        <p:nvSpPr>
+          <p:cNvPr id="12" name="TextBox 11">
+            <a:extLst>
+              <a:ext uri="{FF2B5EF4-FFF2-40B4-BE49-F238E27FC236}">
+                <a16:creationId xmlns:a16="http://schemas.microsoft.com/office/drawing/2014/main" id="{A57BBFEB-182D-250B-2E98-29BA8B4DA62F}"/>
+              </a:ext>
+            </a:extLst>
+          </p:cNvPr>
+          <p:cNvSpPr txBox="1"/>
+          <p:nvPr/>
+        </p:nvSpPr>
+        <p:spPr>
+          <a:xfrm>
+            <a:off x="2508464" y="4539054"/>
+            <a:ext cx="6097022" cy="369332"/>
+          </a:xfrm>
+          <a:prstGeom prst="rect">
+            <a:avLst/>
+          </a:prstGeom>
+          <a:noFill/>
+        </p:spPr>
+        <p:txBody>
+          <a:bodyPr wrap="square">
+            <a:spAutoFit/>
+          </a:bodyPr>
+          <a:lstStyle/>
+          <a:p>
+            <a:r>
+              <a:rPr lang="ko-KR" altLang="en-US" dirty="0"/>
+              <a:t>업무 프로젝트의 </a:t>
+            </a:r>
+            <a:r>
+              <a:rPr lang="en-US" altLang="ko-KR" dirty="0"/>
+              <a:t>Root</a:t>
+            </a:r>
+            <a:r>
+              <a:rPr lang="ko-KR" altLang="en-US" dirty="0"/>
+              <a:t>에 </a:t>
+            </a:r>
+            <a:r>
+              <a:rPr lang="en-US" altLang="ko-KR" dirty="0" err="1"/>
+              <a:t>Dooray</a:t>
+            </a:r>
+            <a:r>
+              <a:rPr lang="en-US" altLang="ko-KR" dirty="0"/>
+              <a:t> </a:t>
+            </a:r>
+            <a:r>
+              <a:rPr lang="ko-KR" altLang="en-US" dirty="0"/>
+              <a:t>폴더 복사</a:t>
+            </a:r>
+          </a:p>
+        </p:txBody>
+      </p:sp>
+      <p:sp>
+        <p:nvSpPr>
+          <p:cNvPr id="13" name="직사각형 12">
+            <a:extLst>
+              <a:ext uri="{FF2B5EF4-FFF2-40B4-BE49-F238E27FC236}">
+                <a16:creationId xmlns:a16="http://schemas.microsoft.com/office/drawing/2014/main" id="{F2AE7FDC-8EC5-774E-E498-0BB1569240F9}"/>
+              </a:ext>
+            </a:extLst>
+          </p:cNvPr>
+          <p:cNvSpPr/>
+          <p:nvPr/>
+        </p:nvSpPr>
+        <p:spPr>
+          <a:xfrm>
+            <a:off x="2783665" y="3761928"/>
+            <a:ext cx="587373" cy="282297"/>
+          </a:xfrm>
+          <a:prstGeom prst="rect">
+            <a:avLst/>
+          </a:prstGeom>
+          <a:noFill/>
+          <a:ln w="38100">
+            <a:solidFill>
+              <a:srgbClr val="FF0000"/>
+            </a:solidFill>
+          </a:ln>
+        </p:spPr>
+        <p:style>
+          <a:lnRef idx="2">
+            <a:schemeClr val="accent1">
+              <a:shade val="15000"/>
+            </a:schemeClr>
+          </a:lnRef>
+          <a:fillRef idx="1">
+            <a:schemeClr val="accent1"/>
+          </a:fillRef>
+          <a:effectRef idx="0">
+            <a:schemeClr val="accent1"/>
+          </a:effectRef>
+          <a:fontRef idx="minor">
+            <a:schemeClr val="lt1"/>
+          </a:fontRef>
+        </p:style>
+        <p:txBody>
+          <a:bodyPr rtlCol="0" anchor="ctr"/>
+          <a:lstStyle/>
+          <a:p>
+            <a:pPr algn="ctr"/>
+            <a:endParaRPr lang="ko-KR" altLang="en-US"/>
+          </a:p>
+        </p:txBody>
+      </p:sp>
+      <p:sp>
+        <p:nvSpPr>
+          <p:cNvPr id="14" name="직사각형 13">
+            <a:extLst>
+              <a:ext uri="{FF2B5EF4-FFF2-40B4-BE49-F238E27FC236}">
+                <a16:creationId xmlns:a16="http://schemas.microsoft.com/office/drawing/2014/main" id="{77FADA85-6E5D-F788-2A44-97BC19110131}"/>
+              </a:ext>
+            </a:extLst>
+          </p:cNvPr>
+          <p:cNvSpPr/>
+          <p:nvPr/>
+        </p:nvSpPr>
+        <p:spPr>
+          <a:xfrm>
+            <a:off x="7079673" y="2448505"/>
+            <a:ext cx="764321" cy="235866"/>
+          </a:xfrm>
+          <a:prstGeom prst="rect">
+            <a:avLst/>
+          </a:prstGeom>
+          <a:noFill/>
+          <a:ln w="38100">
+            <a:solidFill>
+              <a:srgbClr val="FF0000"/>
+            </a:solidFill>
+          </a:ln>
+        </p:spPr>
+        <p:style>
+          <a:lnRef idx="2">
+            <a:schemeClr val="accent1">
+              <a:shade val="15000"/>
+            </a:schemeClr>
+          </a:lnRef>
+          <a:fillRef idx="1">
+            <a:schemeClr val="accent1"/>
+          </a:fillRef>
+          <a:effectRef idx="0">
+            <a:schemeClr val="accent1"/>
+          </a:effectRef>
+          <a:fontRef idx="minor">
+            <a:schemeClr val="lt1"/>
+          </a:fontRef>
+        </p:style>
+        <p:txBody>
+          <a:bodyPr rtlCol="0" anchor="ctr"/>
+          <a:lstStyle/>
+          <a:p>
+            <a:pPr algn="ctr"/>
+            <a:endParaRPr lang="ko-KR" altLang="en-US"/>
+          </a:p>
+        </p:txBody>
+      </p:sp>
+      <p:cxnSp>
+        <p:nvCxnSpPr>
+          <p:cNvPr id="15" name="연결선: 꺾임 14">
+            <a:extLst>
+              <a:ext uri="{FF2B5EF4-FFF2-40B4-BE49-F238E27FC236}">
+                <a16:creationId xmlns:a16="http://schemas.microsoft.com/office/drawing/2014/main" id="{11E9711A-8286-8FED-01AE-3D7BC998A2E6}"/>
+              </a:ext>
+            </a:extLst>
+          </p:cNvPr>
+          <p:cNvCxnSpPr>
+            <a:cxnSpLocks/>
+            <a:stCxn id="13" idx="2"/>
+            <a:endCxn id="14" idx="2"/>
+          </p:cNvCxnSpPr>
+          <p:nvPr/>
+        </p:nvCxnSpPr>
+        <p:spPr>
+          <a:xfrm rot="5400000" flipH="1" flipV="1">
+            <a:off x="4589666" y="1172057"/>
+            <a:ext cx="1359854" cy="4384482"/>
+          </a:xfrm>
+          <a:prstGeom prst="bentConnector3">
+            <a:avLst>
+              <a:gd name="adj1" fmla="val -16811"/>
+            </a:avLst>
+          </a:prstGeom>
+          <a:ln w="38100">
+            <a:solidFill>
+              <a:srgbClr val="FF0000"/>
+            </a:solidFill>
+            <a:tailEnd type="triangle"/>
+          </a:ln>
+        </p:spPr>
+        <p:style>
+          <a:lnRef idx="2">
+            <a:schemeClr val="accent1"/>
+          </a:lnRef>
+          <a:fillRef idx="0">
+            <a:schemeClr val="accent1"/>
+          </a:fillRef>
+          <a:effectRef idx="1">
+            <a:schemeClr val="accent1"/>
+          </a:effectRef>
+          <a:fontRef idx="minor">
+            <a:schemeClr val="tx1"/>
+          </a:fontRef>
+        </p:style>
+      </p:cxnSp>
+    </p:spTree>
+    <p:extLst>
+      <p:ext uri="{BB962C8B-B14F-4D97-AF65-F5344CB8AC3E}">
+        <p14:creationId xmlns:p14="http://schemas.microsoft.com/office/powerpoint/2010/main" val="308600151"/>
+      </p:ext>
+    </p:extLst>
+  </p:cSld>
+  <p:clrMapOvr>
+    <a:masterClrMapping/>
+  </p:clrMapOvr>
+</p:sld>
+</file>
+
+<file path=ppt/slides/slide4.xml><?xml version="1.0" encoding="utf-8"?>
+<p:sld xmlns:a="http://schemas.openxmlformats.org/drawingml/2006/main" xmlns:r="http://schemas.openxmlformats.org/officeDocument/2006/relationships" xmlns:p="http://schemas.openxmlformats.org/presentationml/2006/main">
+  <p:cSld>
+    <p:spTree>
+      <p:nvGrpSpPr>
+        <p:cNvPr id="1" name=""/>
+        <p:cNvGrpSpPr/>
+        <p:nvPr/>
+      </p:nvGrpSpPr>
+      <p:grpSpPr>
+        <a:xfrm>
+          <a:off x="0" y="0"/>
+          <a:ext cx="0" cy="0"/>
+          <a:chOff x="0" y="0"/>
+          <a:chExt cx="0" cy="0"/>
+        </a:xfrm>
+      </p:grpSpPr>
+      <p:pic>
+        <p:nvPicPr>
+          <p:cNvPr id="5" name="그림 4">
+            <a:extLst>
+              <a:ext uri="{FF2B5EF4-FFF2-40B4-BE49-F238E27FC236}">
+                <a16:creationId xmlns:a16="http://schemas.microsoft.com/office/drawing/2014/main" id="{E85AD688-CB81-0F2B-4128-6E290DC288D1}"/>
+              </a:ext>
+            </a:extLst>
+          </p:cNvPr>
+          <p:cNvPicPr>
+            <a:picLocks noChangeAspect="1"/>
+          </p:cNvPicPr>
+          <p:nvPr/>
+        </p:nvPicPr>
+        <p:blipFill>
+          <a:blip r:embed="rId2"/>
+          <a:stretch>
+            <a:fillRect/>
+          </a:stretch>
+        </p:blipFill>
+        <p:spPr>
+          <a:xfrm>
+            <a:off x="278450" y="1389535"/>
+            <a:ext cx="6337074" cy="3427854"/>
+          </a:xfrm>
+          <a:prstGeom prst="rect">
+            <a:avLst/>
+          </a:prstGeom>
+        </p:spPr>
+      </p:pic>
+      <p:grpSp>
+        <p:nvGrpSpPr>
+          <p:cNvPr id="24" name="그룹 23">
+            <a:extLst>
+              <a:ext uri="{FF2B5EF4-FFF2-40B4-BE49-F238E27FC236}">
+                <a16:creationId xmlns:a16="http://schemas.microsoft.com/office/drawing/2014/main" id="{4E72DE4C-0CCA-36F6-E31D-D5DCA07434BC}"/>
+              </a:ext>
+            </a:extLst>
+          </p:cNvPr>
+          <p:cNvGrpSpPr/>
+          <p:nvPr/>
+        </p:nvGrpSpPr>
+        <p:grpSpPr>
+          <a:xfrm>
+            <a:off x="6753551" y="74212"/>
+            <a:ext cx="4746650" cy="5462110"/>
+            <a:chOff x="6753551" y="74212"/>
+            <a:chExt cx="4746650" cy="5462110"/>
+          </a:xfrm>
+        </p:grpSpPr>
+        <p:pic>
+          <p:nvPicPr>
+            <p:cNvPr id="19" name="그림 18">
+              <a:extLst>
+                <a:ext uri="{FF2B5EF4-FFF2-40B4-BE49-F238E27FC236}">
+                  <a16:creationId xmlns:a16="http://schemas.microsoft.com/office/drawing/2014/main" id="{E3E25910-1F26-CE2D-B96C-008FFFBA42E6}"/>
+                </a:ext>
+              </a:extLst>
+            </p:cNvPr>
+            <p:cNvPicPr>
+              <a:picLocks noChangeAspect="1"/>
+            </p:cNvPicPr>
+            <p:nvPr/>
+          </p:nvPicPr>
+          <p:blipFill>
+            <a:blip r:embed="rId3"/>
+            <a:stretch>
+              <a:fillRect/>
+            </a:stretch>
+          </p:blipFill>
+          <p:spPr>
+            <a:xfrm>
+              <a:off x="6753551" y="74212"/>
+              <a:ext cx="4746650" cy="5462110"/>
+            </a:xfrm>
+            <a:prstGeom prst="rect">
+              <a:avLst/>
+            </a:prstGeom>
+          </p:spPr>
+        </p:pic>
+        <p:sp>
+          <p:nvSpPr>
+            <p:cNvPr id="9" name="직사각형 8">
+              <a:extLst>
+                <a:ext uri="{FF2B5EF4-FFF2-40B4-BE49-F238E27FC236}">
+                  <a16:creationId xmlns:a16="http://schemas.microsoft.com/office/drawing/2014/main" id="{8627E061-5993-388A-6271-04420FF17816}"/>
+                </a:ext>
+              </a:extLst>
+            </p:cNvPr>
+            <p:cNvSpPr/>
+            <p:nvPr/>
+          </p:nvSpPr>
+          <p:spPr>
+            <a:xfrm>
+              <a:off x="7067399" y="848287"/>
+              <a:ext cx="1350818" cy="4190117"/>
+            </a:xfrm>
+            <a:prstGeom prst="rect">
+              <a:avLst/>
+            </a:prstGeom>
+          </p:spPr>
+          <p:style>
+            <a:lnRef idx="2">
+              <a:schemeClr val="accent1">
+                <a:shade val="15000"/>
+              </a:schemeClr>
+            </a:lnRef>
+            <a:fillRef idx="1">
+              <a:schemeClr val="accent1"/>
+            </a:fillRef>
+            <a:effectRef idx="0">
+              <a:schemeClr val="accent1"/>
+            </a:effectRef>
+            <a:fontRef idx="minor">
+              <a:schemeClr val="lt1"/>
+            </a:fontRef>
+          </p:style>
+          <p:txBody>
+            <a:bodyPr rtlCol="0" anchor="ctr"/>
+            <a:lstStyle/>
+            <a:p>
+              <a:pPr algn="ctr"/>
+              <a:endParaRPr lang="ko-KR" altLang="en-US"/>
+            </a:p>
+          </p:txBody>
+        </p:sp>
+      </p:grpSp>
+      <p:sp>
+        <p:nvSpPr>
+          <p:cNvPr id="10" name="직사각형 9">
+            <a:extLst>
+              <a:ext uri="{FF2B5EF4-FFF2-40B4-BE49-F238E27FC236}">
+                <a16:creationId xmlns:a16="http://schemas.microsoft.com/office/drawing/2014/main" id="{F738545C-DF68-1834-1359-1DE76EDD23D2}"/>
+              </a:ext>
+            </a:extLst>
+          </p:cNvPr>
+          <p:cNvSpPr/>
+          <p:nvPr/>
+        </p:nvSpPr>
+        <p:spPr>
+          <a:xfrm>
+            <a:off x="2789802" y="3166653"/>
+            <a:ext cx="818703" cy="435721"/>
+          </a:xfrm>
+          <a:prstGeom prst="rect">
+            <a:avLst/>
+          </a:prstGeom>
+          <a:noFill/>
+          <a:ln w="38100">
+            <a:solidFill>
+              <a:srgbClr val="FF0000"/>
+            </a:solidFill>
+          </a:ln>
+        </p:spPr>
+        <p:style>
+          <a:lnRef idx="2">
+            <a:schemeClr val="accent1">
+              <a:shade val="15000"/>
+            </a:schemeClr>
+          </a:lnRef>
+          <a:fillRef idx="1">
+            <a:schemeClr val="accent1"/>
+          </a:fillRef>
+          <a:effectRef idx="0">
+            <a:schemeClr val="accent1"/>
+          </a:effectRef>
+          <a:fontRef idx="minor">
+            <a:schemeClr val="lt1"/>
+          </a:fontRef>
+        </p:style>
+        <p:txBody>
+          <a:bodyPr rtlCol="0" anchor="ctr"/>
+          <a:lstStyle/>
+          <a:p>
+            <a:pPr algn="ctr"/>
+            <a:endParaRPr lang="ko-KR" altLang="en-US"/>
+          </a:p>
+        </p:txBody>
+      </p:sp>
+      <p:sp>
+        <p:nvSpPr>
+          <p:cNvPr id="11" name="직사각형 10">
+            <a:extLst>
+              <a:ext uri="{FF2B5EF4-FFF2-40B4-BE49-F238E27FC236}">
+                <a16:creationId xmlns:a16="http://schemas.microsoft.com/office/drawing/2014/main" id="{1A759512-C779-022A-63B1-54E7A0A1C8EF}"/>
+              </a:ext>
+            </a:extLst>
+          </p:cNvPr>
+          <p:cNvSpPr/>
+          <p:nvPr/>
+        </p:nvSpPr>
+        <p:spPr>
+          <a:xfrm>
+            <a:off x="6854932" y="5093638"/>
+            <a:ext cx="892037" cy="442684"/>
+          </a:xfrm>
+          <a:prstGeom prst="rect">
+            <a:avLst/>
+          </a:prstGeom>
+          <a:noFill/>
+          <a:ln w="38100">
+            <a:solidFill>
+              <a:srgbClr val="FF0000"/>
+            </a:solidFill>
+          </a:ln>
+        </p:spPr>
+        <p:style>
+          <a:lnRef idx="2">
+            <a:schemeClr val="accent1">
+              <a:shade val="15000"/>
+            </a:schemeClr>
+          </a:lnRef>
+          <a:fillRef idx="1">
+            <a:schemeClr val="accent1"/>
+          </a:fillRef>
+          <a:effectRef idx="0">
+            <a:schemeClr val="accent1"/>
+          </a:effectRef>
+          <a:fontRef idx="minor">
+            <a:schemeClr val="lt1"/>
+          </a:fontRef>
+        </p:style>
+        <p:txBody>
+          <a:bodyPr rtlCol="0" anchor="ctr"/>
+          <a:lstStyle/>
+          <a:p>
+            <a:pPr algn="ctr"/>
+            <a:endParaRPr lang="ko-KR" altLang="en-US"/>
+          </a:p>
+        </p:txBody>
+      </p:sp>
+      <p:cxnSp>
+        <p:nvCxnSpPr>
+          <p:cNvPr id="12" name="연결선: 꺾임 11">
+            <a:extLst>
+              <a:ext uri="{FF2B5EF4-FFF2-40B4-BE49-F238E27FC236}">
+                <a16:creationId xmlns:a16="http://schemas.microsoft.com/office/drawing/2014/main" id="{88C06044-606F-8B11-86B0-DCE053A17BAE}"/>
+              </a:ext>
+            </a:extLst>
+          </p:cNvPr>
+          <p:cNvCxnSpPr>
+            <a:cxnSpLocks/>
+            <a:stCxn id="10" idx="2"/>
+            <a:endCxn id="11" idx="2"/>
+          </p:cNvCxnSpPr>
+          <p:nvPr/>
+        </p:nvCxnSpPr>
+        <p:spPr>
+          <a:xfrm rot="16200000" flipH="1">
+            <a:off x="4283078" y="2518449"/>
+            <a:ext cx="1933948" cy="4101797"/>
+          </a:xfrm>
+          <a:prstGeom prst="bentConnector3">
+            <a:avLst>
+              <a:gd name="adj1" fmla="val 111820"/>
+            </a:avLst>
+          </a:prstGeom>
+          <a:ln w="38100">
+            <a:solidFill>
+              <a:srgbClr val="FF0000"/>
+            </a:solidFill>
+            <a:tailEnd type="triangle"/>
+          </a:ln>
+        </p:spPr>
+        <p:style>
+          <a:lnRef idx="2">
+            <a:schemeClr val="accent1"/>
+          </a:lnRef>
+          <a:fillRef idx="0">
+            <a:schemeClr val="accent1"/>
+          </a:fillRef>
+          <a:effectRef idx="1">
+            <a:schemeClr val="accent1"/>
+          </a:effectRef>
+          <a:fontRef idx="minor">
+            <a:schemeClr val="tx1"/>
+          </a:fontRef>
+        </p:style>
+      </p:cxnSp>
+      <p:sp>
+        <p:nvSpPr>
+          <p:cNvPr id="17" name="TextBox 16">
+            <a:extLst>
+              <a:ext uri="{FF2B5EF4-FFF2-40B4-BE49-F238E27FC236}">
+                <a16:creationId xmlns:a16="http://schemas.microsoft.com/office/drawing/2014/main" id="{9FCA5FEB-9202-4D2B-10D0-E7F653F2CED1}"/>
+              </a:ext>
+            </a:extLst>
+          </p:cNvPr>
+          <p:cNvSpPr txBox="1"/>
+          <p:nvPr/>
+        </p:nvSpPr>
+        <p:spPr>
+          <a:xfrm>
+            <a:off x="397366" y="294013"/>
+            <a:ext cx="6097022" cy="369332"/>
+          </a:xfrm>
+          <a:prstGeom prst="rect">
+            <a:avLst/>
+          </a:prstGeom>
+          <a:noFill/>
+        </p:spPr>
+        <p:txBody>
+          <a:bodyPr wrap="square">
+            <a:spAutoFit/>
+          </a:bodyPr>
+          <a:lstStyle/>
+          <a:p>
+            <a:r>
+              <a:rPr lang="en-US" altLang="ko-KR" dirty="0"/>
+              <a:t>AI </a:t>
+            </a:r>
+            <a:r>
+              <a:rPr lang="ko-KR" altLang="en-US" dirty="0"/>
+              <a:t>사용시 예제</a:t>
+            </a:r>
+          </a:p>
+        </p:txBody>
+      </p:sp>
+      <p:sp>
+        <p:nvSpPr>
+          <p:cNvPr id="23" name="TextBox 22">
+            <a:extLst>
+              <a:ext uri="{FF2B5EF4-FFF2-40B4-BE49-F238E27FC236}">
+                <a16:creationId xmlns:a16="http://schemas.microsoft.com/office/drawing/2014/main" id="{D7597C04-FF97-8C57-A761-897A5E445F18}"/>
+              </a:ext>
+            </a:extLst>
+          </p:cNvPr>
+          <p:cNvSpPr txBox="1"/>
+          <p:nvPr/>
+        </p:nvSpPr>
+        <p:spPr>
+          <a:xfrm>
+            <a:off x="3199153" y="5305489"/>
+            <a:ext cx="3307674" cy="461665"/>
+          </a:xfrm>
+          <a:prstGeom prst="rect">
+            <a:avLst/>
+          </a:prstGeom>
+          <a:noFill/>
+        </p:spPr>
+        <p:txBody>
+          <a:bodyPr wrap="square">
+            <a:spAutoFit/>
+          </a:bodyPr>
+          <a:lstStyle/>
+          <a:p>
+            <a:r>
+              <a:rPr lang="en-US" altLang="ko-KR" sz="1200" dirty="0"/>
+              <a:t>DOORAY.md </a:t>
+            </a:r>
+            <a:r>
+              <a:rPr lang="ko-KR" altLang="en-US" sz="1200" dirty="0"/>
+              <a:t>복사</a:t>
+            </a:r>
+            <a:endParaRPr lang="en-US" altLang="ko-KR" sz="1200" dirty="0"/>
+          </a:p>
+          <a:p>
+            <a:r>
+              <a:rPr lang="en-US" altLang="ko-KR" sz="1200" dirty="0"/>
+              <a:t>CLAUDE.md </a:t>
+            </a:r>
+            <a:r>
+              <a:rPr lang="ko-KR" altLang="en-US" sz="1200" dirty="0"/>
+              <a:t>문서 적용</a:t>
+            </a:r>
+          </a:p>
+        </p:txBody>
+      </p:sp>
+    </p:spTree>
+    <p:extLst>
+      <p:ext uri="{BB962C8B-B14F-4D97-AF65-F5344CB8AC3E}">
+        <p14:creationId xmlns:p14="http://schemas.microsoft.com/office/powerpoint/2010/main" val="73486947"/>
+      </p:ext>
+    </p:extLst>
+  </p:cSld>
+  <p:clrMapOvr>
+    <a:masterClrMapping/>
+  </p:clrMapOvr>
+</p:sld>
+</file>
+
+<file path=ppt/slides/slide5.xml><?xml version="1.0" encoding="utf-8"?>
+<p:sld xmlns:a="http://schemas.openxmlformats.org/drawingml/2006/main" xmlns:r="http://schemas.openxmlformats.org/officeDocument/2006/relationships" xmlns:p="http://schemas.openxmlformats.org/presentationml/2006/main">
+  <p:cSld>
+    <p:spTree>
+      <p:nvGrpSpPr>
+        <p:cNvPr id="1" name=""/>
+        <p:cNvGrpSpPr/>
+        <p:nvPr/>
+      </p:nvGrpSpPr>
+      <p:grpSpPr>
+        <a:xfrm>
+          <a:off x="0" y="0"/>
+          <a:ext cx="0" cy="0"/>
+          <a:chOff x="0" y="0"/>
+          <a:chExt cx="0" cy="0"/>
+        </a:xfrm>
+      </p:grpSpPr>
+      <p:pic>
+        <p:nvPicPr>
+          <p:cNvPr id="34" name="그림 33">
+            <a:extLst>
+              <a:ext uri="{FF2B5EF4-FFF2-40B4-BE49-F238E27FC236}">
+                <a16:creationId xmlns:a16="http://schemas.microsoft.com/office/drawing/2014/main" id="{FE33DD55-EC97-8EC0-20CB-3B12BF4594B6}"/>
+              </a:ext>
+            </a:extLst>
+          </p:cNvPr>
+          <p:cNvPicPr>
+            <a:picLocks noChangeAspect="1"/>
+          </p:cNvPicPr>
+          <p:nvPr/>
+        </p:nvPicPr>
+        <p:blipFill>
+          <a:blip r:embed="rId2"/>
+          <a:stretch>
+            <a:fillRect/>
+          </a:stretch>
+        </p:blipFill>
+        <p:spPr>
+          <a:xfrm>
+            <a:off x="5468372" y="2162401"/>
+            <a:ext cx="3516894" cy="3646464"/>
+          </a:xfrm>
+          <a:prstGeom prst="rect">
+            <a:avLst/>
+          </a:prstGeom>
+        </p:spPr>
+      </p:pic>
+      <p:pic>
+        <p:nvPicPr>
+          <p:cNvPr id="5" name="그림 4">
+            <a:extLst>
+              <a:ext uri="{FF2B5EF4-FFF2-40B4-BE49-F238E27FC236}">
+                <a16:creationId xmlns:a16="http://schemas.microsoft.com/office/drawing/2014/main" id="{A9145E75-E9DE-0247-694B-A124EBDC8727}"/>
+              </a:ext>
+            </a:extLst>
+          </p:cNvPr>
+          <p:cNvPicPr>
+            <a:picLocks noChangeAspect="1"/>
+          </p:cNvPicPr>
+          <p:nvPr/>
+        </p:nvPicPr>
+        <p:blipFill>
+          <a:blip r:embed="rId3"/>
+          <a:stretch>
+            <a:fillRect/>
+          </a:stretch>
+        </p:blipFill>
+        <p:spPr>
+          <a:xfrm>
+            <a:off x="4578650" y="800478"/>
+            <a:ext cx="2948783" cy="1224790"/>
+          </a:xfrm>
+          <a:prstGeom prst="rect">
+            <a:avLst/>
+          </a:prstGeom>
+        </p:spPr>
+      </p:pic>
+      <p:pic>
+        <p:nvPicPr>
+          <p:cNvPr id="7" name="그림 6">
+            <a:extLst>
+              <a:ext uri="{FF2B5EF4-FFF2-40B4-BE49-F238E27FC236}">
+                <a16:creationId xmlns:a16="http://schemas.microsoft.com/office/drawing/2014/main" id="{2DC33243-3609-415F-487F-2199F8B3E1C6}"/>
+              </a:ext>
+            </a:extLst>
+          </p:cNvPr>
+          <p:cNvPicPr>
+            <a:picLocks noChangeAspect="1"/>
+          </p:cNvPicPr>
+          <p:nvPr/>
+        </p:nvPicPr>
+        <p:blipFill>
+          <a:blip r:embed="rId4"/>
+          <a:stretch>
+            <a:fillRect/>
+          </a:stretch>
+        </p:blipFill>
+        <p:spPr>
+          <a:xfrm>
+            <a:off x="235492" y="812665"/>
+            <a:ext cx="3969483" cy="2147176"/>
+          </a:xfrm>
+          <a:prstGeom prst="rect">
+            <a:avLst/>
+          </a:prstGeom>
+        </p:spPr>
+      </p:pic>
+      <p:sp>
+        <p:nvSpPr>
+          <p:cNvPr id="8" name="직사각형 7">
+            <a:extLst>
+              <a:ext uri="{FF2B5EF4-FFF2-40B4-BE49-F238E27FC236}">
+                <a16:creationId xmlns:a16="http://schemas.microsoft.com/office/drawing/2014/main" id="{9E24AE88-A464-75E7-B991-DAB19DFDC212}"/>
+              </a:ext>
+            </a:extLst>
+          </p:cNvPr>
+          <p:cNvSpPr/>
+          <p:nvPr/>
+        </p:nvSpPr>
+        <p:spPr>
+          <a:xfrm>
+            <a:off x="1810882" y="2634270"/>
+            <a:ext cx="656158" cy="325572"/>
+          </a:xfrm>
+          <a:prstGeom prst="rect">
+            <a:avLst/>
+          </a:prstGeom>
+          <a:noFill/>
+          <a:ln w="38100">
+            <a:solidFill>
+              <a:srgbClr val="FF0000"/>
+            </a:solidFill>
+          </a:ln>
+        </p:spPr>
+        <p:style>
+          <a:lnRef idx="2">
+            <a:schemeClr val="accent1">
+              <a:shade val="15000"/>
+            </a:schemeClr>
+          </a:lnRef>
+          <a:fillRef idx="1">
+            <a:schemeClr val="accent1"/>
+          </a:fillRef>
+          <a:effectRef idx="0">
+            <a:schemeClr val="accent1"/>
+          </a:effectRef>
+          <a:fontRef idx="minor">
+            <a:schemeClr val="lt1"/>
+          </a:fontRef>
+        </p:style>
+        <p:txBody>
+          <a:bodyPr rtlCol="0" anchor="ctr"/>
+          <a:lstStyle/>
+          <a:p>
+            <a:pPr algn="ctr"/>
+            <a:endParaRPr lang="ko-KR" altLang="en-US"/>
+          </a:p>
+        </p:txBody>
+      </p:sp>
+      <p:sp>
+        <p:nvSpPr>
+          <p:cNvPr id="9" name="직사각형 8">
+            <a:extLst>
+              <a:ext uri="{FF2B5EF4-FFF2-40B4-BE49-F238E27FC236}">
+                <a16:creationId xmlns:a16="http://schemas.microsoft.com/office/drawing/2014/main" id="{8FFFE0A5-AD34-1809-372A-332A5866042B}"/>
+              </a:ext>
+            </a:extLst>
+          </p:cNvPr>
+          <p:cNvSpPr/>
+          <p:nvPr/>
+        </p:nvSpPr>
+        <p:spPr>
+          <a:xfrm>
+            <a:off x="4634209" y="1498198"/>
+            <a:ext cx="661947" cy="398108"/>
+          </a:xfrm>
+          <a:prstGeom prst="rect">
+            <a:avLst/>
+          </a:prstGeom>
+          <a:noFill/>
+          <a:ln w="38100">
+            <a:solidFill>
+              <a:srgbClr val="FF0000"/>
+            </a:solidFill>
+          </a:ln>
+        </p:spPr>
+        <p:style>
+          <a:lnRef idx="2">
+            <a:schemeClr val="accent1">
+              <a:shade val="15000"/>
+            </a:schemeClr>
+          </a:lnRef>
+          <a:fillRef idx="1">
+            <a:schemeClr val="accent1"/>
+          </a:fillRef>
+          <a:effectRef idx="0">
+            <a:schemeClr val="accent1"/>
+          </a:effectRef>
+          <a:fontRef idx="minor">
+            <a:schemeClr val="lt1"/>
+          </a:fontRef>
+        </p:style>
+        <p:txBody>
+          <a:bodyPr rtlCol="0" anchor="ctr"/>
+          <a:lstStyle/>
+          <a:p>
+            <a:pPr algn="ctr"/>
+            <a:endParaRPr lang="ko-KR" altLang="en-US"/>
+          </a:p>
+        </p:txBody>
+      </p:sp>
+      <p:cxnSp>
+        <p:nvCxnSpPr>
+          <p:cNvPr id="10" name="연결선: 꺾임 9">
+            <a:extLst>
+              <a:ext uri="{FF2B5EF4-FFF2-40B4-BE49-F238E27FC236}">
+                <a16:creationId xmlns:a16="http://schemas.microsoft.com/office/drawing/2014/main" id="{3BBA6584-0BD9-484E-D3F4-47811359A417}"/>
+              </a:ext>
+            </a:extLst>
+          </p:cNvPr>
+          <p:cNvCxnSpPr>
+            <a:cxnSpLocks/>
+            <a:stCxn id="8" idx="2"/>
+            <a:endCxn id="9" idx="2"/>
+          </p:cNvCxnSpPr>
+          <p:nvPr/>
+        </p:nvCxnSpPr>
+        <p:spPr>
+          <a:xfrm rot="5400000" flipH="1" flipV="1">
+            <a:off x="3020304" y="1014963"/>
+            <a:ext cx="1063536" cy="2826222"/>
+          </a:xfrm>
+          <a:prstGeom prst="bentConnector3">
+            <a:avLst>
+              <a:gd name="adj1" fmla="val -21494"/>
+            </a:avLst>
+          </a:prstGeom>
+          <a:ln w="38100">
+            <a:solidFill>
+              <a:srgbClr val="FF0000"/>
+            </a:solidFill>
+            <a:tailEnd type="triangle"/>
+          </a:ln>
+        </p:spPr>
+        <p:style>
+          <a:lnRef idx="2">
+            <a:schemeClr val="accent1"/>
+          </a:lnRef>
+          <a:fillRef idx="0">
+            <a:schemeClr val="accent1"/>
+          </a:fillRef>
+          <a:effectRef idx="1">
+            <a:schemeClr val="accent1"/>
+          </a:effectRef>
+          <a:fontRef idx="minor">
+            <a:schemeClr val="tx1"/>
+          </a:fontRef>
+        </p:style>
+      </p:cxnSp>
+      <p:sp>
+        <p:nvSpPr>
+          <p:cNvPr id="14" name="TextBox 13">
+            <a:extLst>
+              <a:ext uri="{FF2B5EF4-FFF2-40B4-BE49-F238E27FC236}">
+                <a16:creationId xmlns:a16="http://schemas.microsoft.com/office/drawing/2014/main" id="{EF3CA5D8-7408-361B-8EE5-9E8CB3B06D23}"/>
+              </a:ext>
+            </a:extLst>
+          </p:cNvPr>
+          <p:cNvSpPr txBox="1"/>
+          <p:nvPr/>
+        </p:nvSpPr>
+        <p:spPr>
+          <a:xfrm>
+            <a:off x="397366" y="294013"/>
+            <a:ext cx="6097022" cy="369332"/>
+          </a:xfrm>
+          <a:prstGeom prst="rect">
+            <a:avLst/>
+          </a:prstGeom>
+          <a:noFill/>
+        </p:spPr>
+        <p:txBody>
+          <a:bodyPr wrap="square">
+            <a:spAutoFit/>
+          </a:bodyPr>
+          <a:lstStyle/>
+          <a:p>
+            <a:r>
+              <a:rPr lang="en-US" altLang="ko-KR" dirty="0"/>
+              <a:t>Claude</a:t>
+            </a:r>
+            <a:r>
+              <a:rPr lang="ko-KR" altLang="en-US" dirty="0"/>
+              <a:t> </a:t>
+            </a:r>
+            <a:r>
+              <a:rPr lang="en-US" altLang="ko-KR" dirty="0"/>
+              <a:t>code,</a:t>
+            </a:r>
+            <a:r>
+              <a:rPr lang="ko-KR" altLang="en-US" dirty="0"/>
+              <a:t> </a:t>
+            </a:r>
+            <a:r>
+              <a:rPr lang="en-US" altLang="ko-KR" dirty="0"/>
+              <a:t>Codex</a:t>
+            </a:r>
+            <a:r>
+              <a:rPr lang="ko-KR" altLang="en-US" dirty="0"/>
+              <a:t> </a:t>
+            </a:r>
+            <a:r>
+              <a:rPr lang="en-US" altLang="ko-KR" dirty="0"/>
+              <a:t>Skill</a:t>
+            </a:r>
+            <a:r>
+              <a:rPr lang="ko-KR" altLang="en-US" dirty="0"/>
+              <a:t>들 복사하기</a:t>
+            </a:r>
+          </a:p>
+        </p:txBody>
+      </p:sp>
+      <p:pic>
+        <p:nvPicPr>
+          <p:cNvPr id="24" name="그림 23">
+            <a:extLst>
+              <a:ext uri="{FF2B5EF4-FFF2-40B4-BE49-F238E27FC236}">
+                <a16:creationId xmlns:a16="http://schemas.microsoft.com/office/drawing/2014/main" id="{9F7BC79F-097E-64F2-AD2E-5DC4498889DB}"/>
+              </a:ext>
+            </a:extLst>
+          </p:cNvPr>
+          <p:cNvPicPr>
+            <a:picLocks noChangeAspect="1"/>
+          </p:cNvPicPr>
+          <p:nvPr/>
+        </p:nvPicPr>
+        <p:blipFill>
+          <a:blip r:embed="rId5"/>
+          <a:stretch>
+            <a:fillRect/>
+          </a:stretch>
+        </p:blipFill>
+        <p:spPr>
+          <a:xfrm>
+            <a:off x="456760" y="3493317"/>
+            <a:ext cx="4121890" cy="3070670"/>
+          </a:xfrm>
+          <a:prstGeom prst="rect">
+            <a:avLst/>
+          </a:prstGeom>
+        </p:spPr>
+      </p:pic>
+      <p:sp>
+        <p:nvSpPr>
+          <p:cNvPr id="26" name="직사각형 25">
+            <a:extLst>
+              <a:ext uri="{FF2B5EF4-FFF2-40B4-BE49-F238E27FC236}">
+                <a16:creationId xmlns:a16="http://schemas.microsoft.com/office/drawing/2014/main" id="{97057BFE-6496-655B-DCC5-25E52147A24A}"/>
+              </a:ext>
+            </a:extLst>
+          </p:cNvPr>
+          <p:cNvSpPr/>
+          <p:nvPr/>
+        </p:nvSpPr>
+        <p:spPr>
+          <a:xfrm>
+            <a:off x="962964" y="3452171"/>
+            <a:ext cx="3615685" cy="325572"/>
+          </a:xfrm>
+          <a:prstGeom prst="rect">
+            <a:avLst/>
+          </a:prstGeom>
+          <a:noFill/>
+          <a:ln w="38100">
+            <a:solidFill>
+              <a:srgbClr val="FF0000"/>
+            </a:solidFill>
+          </a:ln>
+        </p:spPr>
+        <p:style>
+          <a:lnRef idx="2">
+            <a:schemeClr val="accent1">
+              <a:shade val="15000"/>
+            </a:schemeClr>
+          </a:lnRef>
+          <a:fillRef idx="1">
+            <a:schemeClr val="accent1"/>
+          </a:fillRef>
+          <a:effectRef idx="0">
+            <a:schemeClr val="accent1"/>
+          </a:effectRef>
+          <a:fontRef idx="minor">
+            <a:schemeClr val="lt1"/>
+          </a:fontRef>
+        </p:style>
+        <p:txBody>
+          <a:bodyPr rtlCol="0" anchor="ctr"/>
+          <a:lstStyle/>
+          <a:p>
+            <a:pPr algn="ctr"/>
+            <a:endParaRPr lang="ko-KR" altLang="en-US"/>
+          </a:p>
+        </p:txBody>
+      </p:sp>
+      <p:sp>
+        <p:nvSpPr>
+          <p:cNvPr id="27" name="직사각형 26">
+            <a:extLst>
+              <a:ext uri="{FF2B5EF4-FFF2-40B4-BE49-F238E27FC236}">
+                <a16:creationId xmlns:a16="http://schemas.microsoft.com/office/drawing/2014/main" id="{36FC70CF-6DE2-31EB-DA89-3E7D61AFD210}"/>
+              </a:ext>
+            </a:extLst>
+          </p:cNvPr>
+          <p:cNvSpPr/>
+          <p:nvPr/>
+        </p:nvSpPr>
+        <p:spPr>
+          <a:xfrm>
+            <a:off x="720556" y="4684469"/>
+            <a:ext cx="1090325" cy="1519950"/>
+          </a:xfrm>
+          <a:prstGeom prst="rect">
+            <a:avLst/>
+          </a:prstGeom>
+          <a:noFill/>
+          <a:ln w="38100">
+            <a:solidFill>
+              <a:srgbClr val="FF0000"/>
+            </a:solidFill>
+          </a:ln>
+        </p:spPr>
+        <p:style>
+          <a:lnRef idx="2">
+            <a:schemeClr val="accent1">
+              <a:shade val="15000"/>
+            </a:schemeClr>
+          </a:lnRef>
+          <a:fillRef idx="1">
+            <a:schemeClr val="accent1"/>
+          </a:fillRef>
+          <a:effectRef idx="0">
+            <a:schemeClr val="accent1"/>
+          </a:effectRef>
+          <a:fontRef idx="minor">
+            <a:schemeClr val="lt1"/>
+          </a:fontRef>
+        </p:style>
+        <p:txBody>
+          <a:bodyPr rtlCol="0" anchor="ctr"/>
+          <a:lstStyle/>
+          <a:p>
+            <a:pPr algn="ctr"/>
+            <a:endParaRPr lang="ko-KR" altLang="en-US"/>
+          </a:p>
+        </p:txBody>
+      </p:sp>
+      <p:sp>
+        <p:nvSpPr>
+          <p:cNvPr id="28" name="직사각형 27">
+            <a:extLst>
+              <a:ext uri="{FF2B5EF4-FFF2-40B4-BE49-F238E27FC236}">
+                <a16:creationId xmlns:a16="http://schemas.microsoft.com/office/drawing/2014/main" id="{FBB35D52-5EE9-C298-90BD-6A1E128C284C}"/>
+              </a:ext>
+            </a:extLst>
+          </p:cNvPr>
+          <p:cNvSpPr/>
+          <p:nvPr/>
+        </p:nvSpPr>
+        <p:spPr>
+          <a:xfrm>
+            <a:off x="5541633" y="4432069"/>
+            <a:ext cx="952756" cy="1376796"/>
+          </a:xfrm>
+          <a:prstGeom prst="rect">
+            <a:avLst/>
+          </a:prstGeom>
+          <a:noFill/>
+          <a:ln w="38100">
+            <a:solidFill>
+              <a:srgbClr val="FF0000"/>
+            </a:solidFill>
+          </a:ln>
+        </p:spPr>
+        <p:style>
+          <a:lnRef idx="2">
+            <a:schemeClr val="accent1">
+              <a:shade val="15000"/>
+            </a:schemeClr>
+          </a:lnRef>
+          <a:fillRef idx="1">
+            <a:schemeClr val="accent1"/>
+          </a:fillRef>
+          <a:effectRef idx="0">
+            <a:schemeClr val="accent1"/>
+          </a:effectRef>
+          <a:fontRef idx="minor">
+            <a:schemeClr val="lt1"/>
+          </a:fontRef>
+        </p:style>
+        <p:txBody>
+          <a:bodyPr rtlCol="0" anchor="ctr"/>
+          <a:lstStyle/>
+          <a:p>
+            <a:pPr algn="ctr"/>
+            <a:endParaRPr lang="ko-KR" altLang="en-US"/>
+          </a:p>
+        </p:txBody>
+      </p:sp>
+      <p:cxnSp>
+        <p:nvCxnSpPr>
+          <p:cNvPr id="29" name="연결선: 꺾임 28">
+            <a:extLst>
+              <a:ext uri="{FF2B5EF4-FFF2-40B4-BE49-F238E27FC236}">
+                <a16:creationId xmlns:a16="http://schemas.microsoft.com/office/drawing/2014/main" id="{A21C956A-B2E6-3685-2689-2498674E981E}"/>
+              </a:ext>
+            </a:extLst>
+          </p:cNvPr>
+          <p:cNvCxnSpPr>
+            <a:cxnSpLocks/>
+            <a:stCxn id="27" idx="2"/>
+            <a:endCxn id="28" idx="2"/>
+          </p:cNvCxnSpPr>
+          <p:nvPr/>
+        </p:nvCxnSpPr>
+        <p:spPr>
+          <a:xfrm rot="5400000" flipH="1" flipV="1">
+            <a:off x="3444088" y="3630496"/>
+            <a:ext cx="395554" cy="4752292"/>
+          </a:xfrm>
+          <a:prstGeom prst="bentConnector3">
+            <a:avLst>
+              <a:gd name="adj1" fmla="val -57792"/>
+            </a:avLst>
+          </a:prstGeom>
+          <a:ln w="38100">
+            <a:solidFill>
+              <a:srgbClr val="FF0000"/>
+            </a:solidFill>
+            <a:tailEnd type="triangle"/>
+          </a:ln>
+        </p:spPr>
+        <p:style>
+          <a:lnRef idx="2">
+            <a:schemeClr val="accent1"/>
+          </a:lnRef>
+          <a:fillRef idx="0">
+            <a:schemeClr val="accent1"/>
+          </a:fillRef>
+          <a:effectRef idx="1">
+            <a:schemeClr val="accent1"/>
+          </a:effectRef>
+          <a:fontRef idx="minor">
+            <a:schemeClr val="tx1"/>
+          </a:fontRef>
+        </p:style>
+      </p:cxnSp>
+      <p:sp>
+        <p:nvSpPr>
+          <p:cNvPr id="40" name="TextBox 39">
+            <a:extLst>
+              <a:ext uri="{FF2B5EF4-FFF2-40B4-BE49-F238E27FC236}">
+                <a16:creationId xmlns:a16="http://schemas.microsoft.com/office/drawing/2014/main" id="{48F22329-DD58-E7F1-232D-B7D757B1CE79}"/>
+              </a:ext>
+            </a:extLst>
+          </p:cNvPr>
+          <p:cNvSpPr txBox="1"/>
+          <p:nvPr/>
+        </p:nvSpPr>
+        <p:spPr>
+          <a:xfrm>
+            <a:off x="4008804" y="6065919"/>
+            <a:ext cx="1815126" cy="276999"/>
+          </a:xfrm>
+          <a:prstGeom prst="rect">
+            <a:avLst/>
+          </a:prstGeom>
+          <a:noFill/>
+        </p:spPr>
+        <p:txBody>
+          <a:bodyPr wrap="square">
+            <a:spAutoFit/>
+          </a:bodyPr>
+          <a:lstStyle/>
+          <a:p>
+            <a:r>
+              <a:rPr lang="en-US" altLang="ko-KR" sz="1200"/>
+              <a:t>SKILL</a:t>
+            </a:r>
+            <a:r>
+              <a:rPr lang="ko-KR" altLang="en-US" sz="1200" dirty="0"/>
+              <a:t> 복사</a:t>
+            </a:r>
+          </a:p>
+        </p:txBody>
+      </p:sp>
+      <p:sp>
+        <p:nvSpPr>
+          <p:cNvPr id="42" name="TextBox 41">
+            <a:extLst>
+              <a:ext uri="{FF2B5EF4-FFF2-40B4-BE49-F238E27FC236}">
+                <a16:creationId xmlns:a16="http://schemas.microsoft.com/office/drawing/2014/main" id="{1A2CE41C-032F-3D38-F01A-ED1AD8D39BE0}"/>
+              </a:ext>
+            </a:extLst>
+          </p:cNvPr>
+          <p:cNvSpPr txBox="1"/>
+          <p:nvPr/>
+        </p:nvSpPr>
+        <p:spPr>
+          <a:xfrm>
+            <a:off x="9421624" y="5305944"/>
+            <a:ext cx="2313616" cy="276999"/>
+          </a:xfrm>
+          <a:prstGeom prst="rect">
+            <a:avLst/>
+          </a:prstGeom>
+          <a:noFill/>
+        </p:spPr>
+        <p:txBody>
+          <a:bodyPr wrap="square">
+            <a:spAutoFit/>
+          </a:bodyPr>
+          <a:lstStyle/>
+          <a:p>
+            <a:r>
+              <a:rPr lang="en-US" altLang="ko-KR" sz="1200" dirty="0"/>
+              <a:t>.</a:t>
+            </a:r>
+            <a:r>
+              <a:rPr lang="en-US" altLang="ko-KR" sz="1200" dirty="0" err="1"/>
+              <a:t>claude</a:t>
+            </a:r>
+            <a:r>
+              <a:rPr lang="en-US" altLang="ko-KR" sz="1200" dirty="0"/>
+              <a:t>/</a:t>
+            </a:r>
+            <a:r>
+              <a:rPr lang="en-US" altLang="ko-KR" sz="1200" dirty="0" err="1"/>
+              <a:t>setting.json</a:t>
+            </a:r>
+            <a:r>
+              <a:rPr lang="en-US" altLang="ko-KR" sz="1200" dirty="0"/>
+              <a:t> </a:t>
+            </a:r>
+            <a:r>
+              <a:rPr lang="ko-KR" altLang="en-US" sz="1200" dirty="0"/>
+              <a:t>적용하기</a:t>
+            </a:r>
+          </a:p>
+        </p:txBody>
+      </p:sp>
+      <p:sp>
+        <p:nvSpPr>
+          <p:cNvPr id="44" name="직사각형 43">
+            <a:extLst>
+              <a:ext uri="{FF2B5EF4-FFF2-40B4-BE49-F238E27FC236}">
+                <a16:creationId xmlns:a16="http://schemas.microsoft.com/office/drawing/2014/main" id="{0D6E3E4F-F0B9-252A-E5D0-5FD3178D9131}"/>
+              </a:ext>
+            </a:extLst>
+          </p:cNvPr>
+          <p:cNvSpPr/>
+          <p:nvPr/>
+        </p:nvSpPr>
+        <p:spPr>
+          <a:xfrm>
+            <a:off x="5541633" y="2881436"/>
+            <a:ext cx="1350818" cy="1506457"/>
+          </a:xfrm>
+          <a:prstGeom prst="rect">
+            <a:avLst/>
+          </a:prstGeom>
+        </p:spPr>
+        <p:style>
+          <a:lnRef idx="2">
+            <a:schemeClr val="accent1">
+              <a:shade val="15000"/>
+            </a:schemeClr>
+          </a:lnRef>
+          <a:fillRef idx="1">
+            <a:schemeClr val="accent1"/>
+          </a:fillRef>
+          <a:effectRef idx="0">
+            <a:schemeClr val="accent1"/>
+          </a:effectRef>
+          <a:fontRef idx="minor">
+            <a:schemeClr val="lt1"/>
+          </a:fontRef>
+        </p:style>
+        <p:txBody>
+          <a:bodyPr rtlCol="0" anchor="ctr"/>
+          <a:lstStyle/>
+          <a:p>
+            <a:pPr algn="ctr"/>
+            <a:endParaRPr lang="ko-KR" altLang="en-US"/>
+          </a:p>
+        </p:txBody>
+      </p:sp>
+      <p:pic>
+        <p:nvPicPr>
+          <p:cNvPr id="46" name="그림 45">
+            <a:extLst>
+              <a:ext uri="{FF2B5EF4-FFF2-40B4-BE49-F238E27FC236}">
+                <a16:creationId xmlns:a16="http://schemas.microsoft.com/office/drawing/2014/main" id="{25348C1A-55E5-3F22-2CAC-738A5F113115}"/>
+              </a:ext>
+            </a:extLst>
+          </p:cNvPr>
+          <p:cNvPicPr>
+            <a:picLocks noChangeAspect="1"/>
+          </p:cNvPicPr>
+          <p:nvPr/>
+        </p:nvPicPr>
+        <p:blipFill>
+          <a:blip r:embed="rId6"/>
+          <a:stretch>
+            <a:fillRect/>
+          </a:stretch>
+        </p:blipFill>
+        <p:spPr>
+          <a:xfrm>
+            <a:off x="9334236" y="4432069"/>
+            <a:ext cx="1943371" cy="809738"/>
+          </a:xfrm>
+          <a:prstGeom prst="rect">
+            <a:avLst/>
+          </a:prstGeom>
+        </p:spPr>
+      </p:pic>
+      <p:sp>
+        <p:nvSpPr>
+          <p:cNvPr id="48" name="직사각형 47">
+            <a:extLst>
+              <a:ext uri="{FF2B5EF4-FFF2-40B4-BE49-F238E27FC236}">
+                <a16:creationId xmlns:a16="http://schemas.microsoft.com/office/drawing/2014/main" id="{19BF1E3C-4603-E7CC-0B18-2E3C6E84DD52}"/>
+              </a:ext>
+            </a:extLst>
+          </p:cNvPr>
+          <p:cNvSpPr/>
+          <p:nvPr/>
+        </p:nvSpPr>
+        <p:spPr>
+          <a:xfrm>
+            <a:off x="9488455" y="4980372"/>
+            <a:ext cx="938160" cy="261435"/>
+          </a:xfrm>
+          <a:prstGeom prst="rect">
+            <a:avLst/>
+          </a:prstGeom>
+          <a:noFill/>
+          <a:ln w="38100">
+            <a:solidFill>
+              <a:srgbClr val="FF0000"/>
+            </a:solidFill>
+          </a:ln>
+        </p:spPr>
+        <p:style>
+          <a:lnRef idx="2">
+            <a:schemeClr val="accent1">
+              <a:shade val="15000"/>
+            </a:schemeClr>
+          </a:lnRef>
+          <a:fillRef idx="1">
+            <a:schemeClr val="accent1"/>
+          </a:fillRef>
+          <a:effectRef idx="0">
+            <a:schemeClr val="accent1"/>
+          </a:effectRef>
+          <a:fontRef idx="minor">
+            <a:schemeClr val="lt1"/>
+          </a:fontRef>
+        </p:style>
+        <p:txBody>
+          <a:bodyPr rtlCol="0" anchor="ctr"/>
+          <a:lstStyle/>
+          <a:p>
+            <a:pPr algn="ctr"/>
+            <a:endParaRPr lang="ko-KR" altLang="en-US"/>
+          </a:p>
+        </p:txBody>
+      </p:sp>
+    </p:spTree>
+    <p:extLst>
+      <p:ext uri="{BB962C8B-B14F-4D97-AF65-F5344CB8AC3E}">
+        <p14:creationId xmlns:p14="http://schemas.microsoft.com/office/powerpoint/2010/main" val="905277129"/>
+      </p:ext>
+    </p:extLst>
+  </p:cSld>
+  <p:clrMapOvr>
+    <a:masterClrMapping/>
+  </p:clrMapOvr>
+</p:sld>
+</file>
+
+<file path=ppt/slides/slide6.xml><?xml version="1.0" encoding="utf-8"?>
+<p:sld xmlns:a="http://schemas.openxmlformats.org/drawingml/2006/main" xmlns:r="http://schemas.openxmlformats.org/officeDocument/2006/relationships" xmlns:p="http://schemas.openxmlformats.org/presentationml/2006/main">
+  <p:cSld>
+    <p:spTree>
+      <p:nvGrpSpPr>
+        <p:cNvPr id="1" name="">
+          <a:extLst>
+            <a:ext uri="{FF2B5EF4-FFF2-40B4-BE49-F238E27FC236}">
+              <a16:creationId xmlns:a16="http://schemas.microsoft.com/office/drawing/2014/main" id="{E7C0E41D-DE4D-DF06-9DDC-E3BAF565B271}"/>
+            </a:ext>
+          </a:extLst>
+        </p:cNvPr>
+        <p:cNvGrpSpPr/>
+        <p:nvPr/>
+      </p:nvGrpSpPr>
+      <p:grpSpPr>
+        <a:xfrm>
+          <a:off x="0" y="0"/>
+          <a:ext cx="0" cy="0"/>
+          <a:chOff x="0" y="0"/>
+          <a:chExt cx="0" cy="0"/>
+        </a:xfrm>
+      </p:grpSpPr>
+      <p:sp>
+        <p:nvSpPr>
+          <p:cNvPr id="4" name="TextBox 3">
+            <a:extLst>
+              <a:ext uri="{FF2B5EF4-FFF2-40B4-BE49-F238E27FC236}">
+                <a16:creationId xmlns:a16="http://schemas.microsoft.com/office/drawing/2014/main" id="{8ECC6D59-4EA8-C463-ACFD-43EB7E771D91}"/>
+              </a:ext>
+            </a:extLst>
+          </p:cNvPr>
+          <p:cNvSpPr txBox="1"/>
+          <p:nvPr/>
+        </p:nvSpPr>
+        <p:spPr>
+          <a:xfrm>
+            <a:off x="2178604" y="2976403"/>
+            <a:ext cx="7778091" cy="769441"/>
+          </a:xfrm>
+          <a:prstGeom prst="rect">
+            <a:avLst/>
+          </a:prstGeom>
+          <a:noFill/>
+        </p:spPr>
+        <p:txBody>
+          <a:bodyPr wrap="none" rtlCol="0">
+            <a:spAutoFit/>
+          </a:bodyPr>
+          <a:lstStyle/>
+          <a:p>
+            <a:r>
+              <a:rPr lang="en-US" altLang="ko-KR" sz="4400" dirty="0"/>
+              <a:t>2. </a:t>
+            </a:r>
+            <a:r>
+              <a:rPr lang="en-US" altLang="ko-KR" sz="4400" dirty="0" err="1"/>
+              <a:t>Dooray</a:t>
+            </a:r>
+            <a:r>
+              <a:rPr lang="en-US" altLang="ko-KR" sz="4400" dirty="0"/>
+              <a:t> </a:t>
+            </a:r>
+            <a:r>
+              <a:rPr lang="ko-KR" altLang="en-US" sz="4400" dirty="0"/>
+              <a:t>프로젝트 연결 방법</a:t>
+            </a:r>
+          </a:p>
+        </p:txBody>
+      </p:sp>
+    </p:spTree>
+    <p:extLst>
+      <p:ext uri="{BB962C8B-B14F-4D97-AF65-F5344CB8AC3E}">
+        <p14:creationId xmlns:p14="http://schemas.microsoft.com/office/powerpoint/2010/main" val="3198344258"/>
+      </p:ext>
+    </p:extLst>
+  </p:cSld>
+  <p:clrMapOvr>
+    <a:masterClrMapping/>
+  </p:clrMapOvr>
+</p:sld>
+</file>
+
+<file path=ppt/slides/slide7.xml><?xml version="1.0" encoding="utf-8"?>
+<p:sld xmlns:a="http://schemas.openxmlformats.org/drawingml/2006/main" xmlns:r="http://schemas.openxmlformats.org/officeDocument/2006/relationships" xmlns:p="http://schemas.openxmlformats.org/presentationml/2006/main">
+  <p:cSld>
+    <p:spTree>
+      <p:nvGrpSpPr>
+        <p:cNvPr id="1" name=""/>
+        <p:cNvGrpSpPr/>
+        <p:nvPr/>
+      </p:nvGrpSpPr>
+      <p:grpSpPr>
+        <a:xfrm>
+          <a:off x="0" y="0"/>
+          <a:ext cx="0" cy="0"/>
+          <a:chOff x="0" y="0"/>
+          <a:chExt cx="0" cy="0"/>
+        </a:xfrm>
+      </p:grpSpPr>
+      <p:pic>
+        <p:nvPicPr>
+          <p:cNvPr id="5" name="그림 4">
+            <a:extLst>
+              <a:ext uri="{FF2B5EF4-FFF2-40B4-BE49-F238E27FC236}">
+                <a16:creationId xmlns:a16="http://schemas.microsoft.com/office/drawing/2014/main" id="{047A93DD-34B2-1536-18EB-42554C35B86F}"/>
+              </a:ext>
+            </a:extLst>
+          </p:cNvPr>
+          <p:cNvPicPr>
+            <a:picLocks noChangeAspect="1"/>
+          </p:cNvPicPr>
+          <p:nvPr/>
+        </p:nvPicPr>
+        <p:blipFill>
+          <a:blip r:embed="rId2"/>
+          <a:stretch>
+            <a:fillRect/>
+          </a:stretch>
+        </p:blipFill>
+        <p:spPr>
+          <a:xfrm>
+            <a:off x="667494" y="583766"/>
+            <a:ext cx="8377633" cy="2845234"/>
+          </a:xfrm>
+          <a:prstGeom prst="rect">
+            <a:avLst/>
+          </a:prstGeom>
+        </p:spPr>
+      </p:pic>
+      <p:sp>
+        <p:nvSpPr>
+          <p:cNvPr id="6" name="직사각형 5">
+            <a:extLst>
+              <a:ext uri="{FF2B5EF4-FFF2-40B4-BE49-F238E27FC236}">
+                <a16:creationId xmlns:a16="http://schemas.microsoft.com/office/drawing/2014/main" id="{027A7B5A-4064-637D-5731-5F43721674D3}"/>
+              </a:ext>
+            </a:extLst>
+          </p:cNvPr>
+          <p:cNvSpPr/>
+          <p:nvPr/>
+        </p:nvSpPr>
+        <p:spPr>
+          <a:xfrm>
+            <a:off x="1466722" y="540048"/>
+            <a:ext cx="2049729" cy="362078"/>
+          </a:xfrm>
+          <a:prstGeom prst="rect">
+            <a:avLst/>
+          </a:prstGeom>
+          <a:noFill/>
+          <a:ln w="38100">
+            <a:solidFill>
+              <a:srgbClr val="FF0000"/>
+            </a:solidFill>
+          </a:ln>
+        </p:spPr>
+        <p:style>
+          <a:lnRef idx="2">
+            <a:schemeClr val="accent1">
+              <a:shade val="15000"/>
+            </a:schemeClr>
+          </a:lnRef>
+          <a:fillRef idx="1">
+            <a:schemeClr val="accent1"/>
+          </a:fillRef>
+          <a:effectRef idx="0">
+            <a:schemeClr val="accent1"/>
+          </a:effectRef>
+          <a:fontRef idx="minor">
+            <a:schemeClr val="lt1"/>
+          </a:fontRef>
+        </p:style>
+        <p:txBody>
+          <a:bodyPr rtlCol="0" anchor="ctr"/>
+          <a:lstStyle/>
+          <a:p>
+            <a:pPr algn="ctr"/>
+            <a:endParaRPr lang="ko-KR" altLang="en-US"/>
+          </a:p>
+        </p:txBody>
+      </p:sp>
+      <p:sp>
+        <p:nvSpPr>
+          <p:cNvPr id="8" name="직사각형 7">
+            <a:extLst>
+              <a:ext uri="{FF2B5EF4-FFF2-40B4-BE49-F238E27FC236}">
+                <a16:creationId xmlns:a16="http://schemas.microsoft.com/office/drawing/2014/main" id="{1439A115-EE2F-06C4-1611-95B75A9662C0}"/>
+              </a:ext>
+            </a:extLst>
+          </p:cNvPr>
+          <p:cNvSpPr/>
+          <p:nvPr/>
+        </p:nvSpPr>
+        <p:spPr>
+          <a:xfrm>
+            <a:off x="667494" y="2871052"/>
+            <a:ext cx="1290181" cy="301732"/>
+          </a:xfrm>
+          <a:prstGeom prst="rect">
+            <a:avLst/>
+          </a:prstGeom>
+          <a:noFill/>
+          <a:ln w="38100">
+            <a:solidFill>
+              <a:srgbClr val="FF0000"/>
+            </a:solidFill>
+          </a:ln>
+        </p:spPr>
+        <p:style>
+          <a:lnRef idx="2">
+            <a:schemeClr val="accent1">
+              <a:shade val="15000"/>
+            </a:schemeClr>
+          </a:lnRef>
+          <a:fillRef idx="1">
+            <a:schemeClr val="accent1"/>
+          </a:fillRef>
+          <a:effectRef idx="0">
+            <a:schemeClr val="accent1"/>
+          </a:effectRef>
+          <a:fontRef idx="minor">
+            <a:schemeClr val="lt1"/>
+          </a:fontRef>
+        </p:style>
+        <p:txBody>
+          <a:bodyPr rtlCol="0" anchor="ctr"/>
+          <a:lstStyle/>
+          <a:p>
+            <a:pPr algn="ctr"/>
+            <a:endParaRPr lang="ko-KR" altLang="en-US"/>
+          </a:p>
+        </p:txBody>
+      </p:sp>
+      <p:sp>
+        <p:nvSpPr>
+          <p:cNvPr id="10" name="직사각형 9">
+            <a:extLst>
+              <a:ext uri="{FF2B5EF4-FFF2-40B4-BE49-F238E27FC236}">
+                <a16:creationId xmlns:a16="http://schemas.microsoft.com/office/drawing/2014/main" id="{D1CF7E3C-8078-6E03-92E8-F40147300660}"/>
+              </a:ext>
+            </a:extLst>
+          </p:cNvPr>
+          <p:cNvSpPr/>
+          <p:nvPr/>
+        </p:nvSpPr>
+        <p:spPr>
+          <a:xfrm>
+            <a:off x="8254148" y="1741860"/>
+            <a:ext cx="667900" cy="301732"/>
+          </a:xfrm>
+          <a:prstGeom prst="rect">
+            <a:avLst/>
+          </a:prstGeom>
+          <a:noFill/>
+          <a:ln w="38100">
+            <a:solidFill>
+              <a:srgbClr val="FF0000"/>
+            </a:solidFill>
+          </a:ln>
+        </p:spPr>
+        <p:style>
+          <a:lnRef idx="2">
+            <a:schemeClr val="accent1">
+              <a:shade val="15000"/>
+            </a:schemeClr>
+          </a:lnRef>
+          <a:fillRef idx="1">
+            <a:schemeClr val="accent1"/>
+          </a:fillRef>
+          <a:effectRef idx="0">
+            <a:schemeClr val="accent1"/>
+          </a:effectRef>
+          <a:fontRef idx="minor">
+            <a:schemeClr val="lt1"/>
+          </a:fontRef>
+        </p:style>
+        <p:txBody>
+          <a:bodyPr rtlCol="0" anchor="ctr"/>
+          <a:lstStyle/>
+          <a:p>
+            <a:pPr algn="ctr"/>
+            <a:endParaRPr lang="ko-KR" altLang="en-US"/>
+          </a:p>
+        </p:txBody>
+      </p:sp>
+      <p:pic>
+        <p:nvPicPr>
+          <p:cNvPr id="7" name="Picture 2"/>
           <p:cNvPicPr>
             <a:picLocks noChangeAspect="1" noChangeArrowheads="1"/>
           </p:cNvPicPr>
           <p:nvPr/>
         </p:nvPicPr>
         <p:blipFill>
-          <a:blip r:embed="rId2">
+          <a:blip r:embed="rId3">
             <a:extLst>
               <a:ext uri="{28A0092B-C50C-407E-A947-70E740481C1C}">
                 <a14:useLocalDpi xmlns:a14="http://schemas.microsoft.com/office/drawing/2010/main" val="0"/>
@@ -3773,8 +6196,8 @@
         </p:blipFill>
         <p:spPr bwMode="auto">
           <a:xfrm>
-            <a:off x="736778" y="1680322"/>
-            <a:ext cx="2682912" cy="3276545"/>
+            <a:off x="1312584" y="4622819"/>
+            <a:ext cx="1428750" cy="1076325"/>
           </a:xfrm>
           <a:prstGeom prst="rect">
             <a:avLst/>
@@ -3804,68 +6227,16 @@
           </a:extLst>
         </p:spPr>
       </p:pic>
-      <p:sp>
-        <p:nvSpPr>
-          <p:cNvPr id="6" name="직사각형 5">
-            <a:extLst>
-              <a:ext uri="{FF2B5EF4-FFF2-40B4-BE49-F238E27FC236}">
-                <a16:creationId xmlns:a16="http://schemas.microsoft.com/office/drawing/2014/main" xmlns="" id="{1439A115-EE2F-06C4-1611-95B75A9662C0}"/>
-              </a:ext>
-            </a:extLst>
-          </p:cNvPr>
-          <p:cNvSpPr/>
-          <p:nvPr/>
-        </p:nvSpPr>
-        <p:spPr>
-          <a:xfrm>
-            <a:off x="736778" y="2363474"/>
-            <a:ext cx="511109" cy="422757"/>
-          </a:xfrm>
-          <a:prstGeom prst="rect">
-            <a:avLst/>
-          </a:prstGeom>
-          <a:noFill/>
-          <a:ln w="38100">
-            <a:solidFill>
-              <a:srgbClr val="FF0000"/>
-            </a:solidFill>
-          </a:ln>
-        </p:spPr>
-        <p:style>
-          <a:lnRef idx="2">
-            <a:schemeClr val="accent1">
-              <a:shade val="15000"/>
-            </a:schemeClr>
-          </a:lnRef>
-          <a:fillRef idx="1">
-            <a:schemeClr val="accent1"/>
-          </a:fillRef>
-          <a:effectRef idx="0">
-            <a:schemeClr val="accent1"/>
-          </a:effectRef>
-          <a:fontRef idx="minor">
-            <a:schemeClr val="lt1"/>
-          </a:fontRef>
-        </p:style>
-        <p:txBody>
-          <a:bodyPr rtlCol="0" anchor="ctr"/>
-          <a:lstStyle/>
-          <a:p>
-            <a:pPr algn="ctr"/>
-            <a:endParaRPr lang="ko-KR" altLang="en-US"/>
-          </a:p>
-        </p:txBody>
-      </p:sp>
       <p:pic>
         <p:nvPicPr>
-          <p:cNvPr id="1028" name="Picture 4"/>
+          <p:cNvPr id="2050" name="Picture 2"/>
           <p:cNvPicPr>
             <a:picLocks noChangeAspect="1" noChangeArrowheads="1"/>
           </p:cNvPicPr>
           <p:nvPr/>
         </p:nvPicPr>
         <p:blipFill>
-          <a:blip r:embed="rId3">
+          <a:blip r:embed="rId4">
             <a:extLst>
               <a:ext uri="{28A0092B-C50C-407E-A947-70E740481C1C}">
                 <a14:useLocalDpi xmlns:a14="http://schemas.microsoft.com/office/drawing/2010/main" val="0"/>
@@ -3879,8 +6250,8 @@
         </p:blipFill>
         <p:spPr bwMode="auto">
           <a:xfrm>
-            <a:off x="4569311" y="1680322"/>
-            <a:ext cx="3194125" cy="2794859"/>
+            <a:off x="5164455" y="4870412"/>
+            <a:ext cx="2228850" cy="1162050"/>
           </a:xfrm>
           <a:prstGeom prst="rect">
             <a:avLst/>
@@ -3912,10 +6283,10 @@
       </p:pic>
       <p:sp>
         <p:nvSpPr>
-          <p:cNvPr id="8" name="직사각형 7">
-            <a:extLst>
-              <a:ext uri="{FF2B5EF4-FFF2-40B4-BE49-F238E27FC236}">
-                <a16:creationId xmlns:a16="http://schemas.microsoft.com/office/drawing/2014/main" xmlns="" id="{1439A115-EE2F-06C4-1611-95B75A9662C0}"/>
+          <p:cNvPr id="9" name="직사각형 8">
+            <a:extLst>
+              <a:ext uri="{FF2B5EF4-FFF2-40B4-BE49-F238E27FC236}">
+                <a16:creationId xmlns:a16="http://schemas.microsoft.com/office/drawing/2014/main" id="{1439A115-EE2F-06C4-1611-95B75A9662C0}"/>
               </a:ext>
             </a:extLst>
           </p:cNvPr>
@@ -3924,8 +6295,8 @@
         </p:nvSpPr>
         <p:spPr>
           <a:xfrm>
-            <a:off x="4654355" y="2010830"/>
-            <a:ext cx="1348412" cy="422757"/>
+            <a:off x="1381868" y="5149705"/>
+            <a:ext cx="1290181" cy="301732"/>
           </a:xfrm>
           <a:prstGeom prst="rect">
             <a:avLst/>
@@ -3962,16 +6333,400 @@
           </a:p>
         </p:txBody>
       </p:sp>
+      <p:sp>
+        <p:nvSpPr>
+          <p:cNvPr id="11" name="직사각형 10">
+            <a:extLst>
+              <a:ext uri="{FF2B5EF4-FFF2-40B4-BE49-F238E27FC236}">
+                <a16:creationId xmlns:a16="http://schemas.microsoft.com/office/drawing/2014/main" id="{1439A115-EE2F-06C4-1611-95B75A9662C0}"/>
+              </a:ext>
+            </a:extLst>
+          </p:cNvPr>
+          <p:cNvSpPr/>
+          <p:nvPr/>
+        </p:nvSpPr>
+        <p:spPr>
+          <a:xfrm>
+            <a:off x="5164455" y="4847973"/>
+            <a:ext cx="2613324" cy="257938"/>
+          </a:xfrm>
+          <a:prstGeom prst="rect">
+            <a:avLst/>
+          </a:prstGeom>
+          <a:noFill/>
+          <a:ln w="38100">
+            <a:solidFill>
+              <a:srgbClr val="FF0000"/>
+            </a:solidFill>
+          </a:ln>
+        </p:spPr>
+        <p:style>
+          <a:lnRef idx="2">
+            <a:schemeClr val="accent1">
+              <a:shade val="15000"/>
+            </a:schemeClr>
+          </a:lnRef>
+          <a:fillRef idx="1">
+            <a:schemeClr val="accent1"/>
+          </a:fillRef>
+          <a:effectRef idx="0">
+            <a:schemeClr val="accent1"/>
+          </a:effectRef>
+          <a:fontRef idx="minor">
+            <a:schemeClr val="lt1"/>
+          </a:fontRef>
+        </p:style>
+        <p:txBody>
+          <a:bodyPr rtlCol="0" anchor="ctr"/>
+          <a:lstStyle/>
+          <a:p>
+            <a:pPr algn="ctr"/>
+            <a:endParaRPr lang="ko-KR" altLang="en-US"/>
+          </a:p>
+        </p:txBody>
+      </p:sp>
+      <p:cxnSp>
+        <p:nvCxnSpPr>
+          <p:cNvPr id="3" name="연결선: 꺾임 2">
+            <a:extLst>
+              <a:ext uri="{FF2B5EF4-FFF2-40B4-BE49-F238E27FC236}">
+                <a16:creationId xmlns:a16="http://schemas.microsoft.com/office/drawing/2014/main" id="{DD1DA0EB-FBC6-B61A-C098-C6921A2ECF85}"/>
+              </a:ext>
+            </a:extLst>
+          </p:cNvPr>
+          <p:cNvCxnSpPr>
+            <a:cxnSpLocks/>
+            <a:stCxn id="6" idx="1"/>
+            <a:endCxn id="8" idx="1"/>
+          </p:cNvCxnSpPr>
+          <p:nvPr/>
+        </p:nvCxnSpPr>
+        <p:spPr>
+          <a:xfrm rot="10800000" flipV="1">
+            <a:off x="667494" y="721086"/>
+            <a:ext cx="799228" cy="2300831"/>
+          </a:xfrm>
+          <a:prstGeom prst="bentConnector3">
+            <a:avLst>
+              <a:gd name="adj1" fmla="val 128603"/>
+            </a:avLst>
+          </a:prstGeom>
+          <a:ln w="38100">
+            <a:solidFill>
+              <a:srgbClr val="FF0000"/>
+            </a:solidFill>
+            <a:tailEnd type="triangle"/>
+          </a:ln>
+        </p:spPr>
+        <p:style>
+          <a:lnRef idx="2">
+            <a:schemeClr val="accent1"/>
+          </a:lnRef>
+          <a:fillRef idx="0">
+            <a:schemeClr val="accent1"/>
+          </a:fillRef>
+          <a:effectRef idx="1">
+            <a:schemeClr val="accent1"/>
+          </a:effectRef>
+          <a:fontRef idx="minor">
+            <a:schemeClr val="tx1"/>
+          </a:fontRef>
+        </p:style>
+      </p:cxnSp>
+      <p:cxnSp>
+        <p:nvCxnSpPr>
+          <p:cNvPr id="4" name="연결선: 꺾임 3">
+            <a:extLst>
+              <a:ext uri="{FF2B5EF4-FFF2-40B4-BE49-F238E27FC236}">
+                <a16:creationId xmlns:a16="http://schemas.microsoft.com/office/drawing/2014/main" id="{395BF869-25E5-352B-F8C0-BAE29748CCE8}"/>
+              </a:ext>
+            </a:extLst>
+          </p:cNvPr>
+          <p:cNvCxnSpPr>
+            <a:cxnSpLocks/>
+            <a:stCxn id="10" idx="3"/>
+            <a:endCxn id="8" idx="2"/>
+          </p:cNvCxnSpPr>
+          <p:nvPr/>
+        </p:nvCxnSpPr>
+        <p:spPr>
+          <a:xfrm flipH="1">
+            <a:off x="1312585" y="1892726"/>
+            <a:ext cx="7609463" cy="1280058"/>
+          </a:xfrm>
+          <a:prstGeom prst="bentConnector4">
+            <a:avLst>
+              <a:gd name="adj1" fmla="val -3004"/>
+              <a:gd name="adj2" fmla="val 117859"/>
+            </a:avLst>
+          </a:prstGeom>
+          <a:ln w="38100">
+            <a:solidFill>
+              <a:srgbClr val="FF0000"/>
+            </a:solidFill>
+            <a:tailEnd type="triangle"/>
+          </a:ln>
+        </p:spPr>
+        <p:style>
+          <a:lnRef idx="2">
+            <a:schemeClr val="accent1"/>
+          </a:lnRef>
+          <a:fillRef idx="0">
+            <a:schemeClr val="accent1"/>
+          </a:fillRef>
+          <a:effectRef idx="1">
+            <a:schemeClr val="accent1"/>
+          </a:effectRef>
+          <a:fontRef idx="minor">
+            <a:schemeClr val="tx1"/>
+          </a:fontRef>
+        </p:style>
+      </p:cxnSp>
+      <p:cxnSp>
+        <p:nvCxnSpPr>
+          <p:cNvPr id="17" name="직선 화살표 연결선 16">
+            <a:extLst>
+              <a:ext uri="{FF2B5EF4-FFF2-40B4-BE49-F238E27FC236}">
+                <a16:creationId xmlns:a16="http://schemas.microsoft.com/office/drawing/2014/main" id="{9B92ED6B-FDBC-9226-FB88-9B311DD5A6A9}"/>
+              </a:ext>
+            </a:extLst>
+          </p:cNvPr>
+          <p:cNvCxnSpPr>
+            <a:stCxn id="10" idx="1"/>
+          </p:cNvCxnSpPr>
+          <p:nvPr/>
+        </p:nvCxnSpPr>
+        <p:spPr>
+          <a:xfrm flipH="1">
+            <a:off x="7223146" y="1892726"/>
+            <a:ext cx="1031002" cy="1077540"/>
+          </a:xfrm>
+          <a:prstGeom prst="straightConnector1">
+            <a:avLst/>
+          </a:prstGeom>
+          <a:ln w="38100">
+            <a:solidFill>
+              <a:srgbClr val="FF0000"/>
+            </a:solidFill>
+            <a:tailEnd type="triangle"/>
+          </a:ln>
+        </p:spPr>
+        <p:style>
+          <a:lnRef idx="2">
+            <a:schemeClr val="accent1"/>
+          </a:lnRef>
+          <a:fillRef idx="0">
+            <a:schemeClr val="accent1"/>
+          </a:fillRef>
+          <a:effectRef idx="1">
+            <a:schemeClr val="accent1"/>
+          </a:effectRef>
+          <a:fontRef idx="minor">
+            <a:schemeClr val="tx1"/>
+          </a:fontRef>
+        </p:style>
+      </p:cxnSp>
+      <p:cxnSp>
+        <p:nvCxnSpPr>
+          <p:cNvPr id="18" name="직선 화살표 연결선 17">
+            <a:extLst>
+              <a:ext uri="{FF2B5EF4-FFF2-40B4-BE49-F238E27FC236}">
+                <a16:creationId xmlns:a16="http://schemas.microsoft.com/office/drawing/2014/main" id="{43E2BA95-B7B2-7871-9143-FF90A92FD9C9}"/>
+              </a:ext>
+            </a:extLst>
+          </p:cNvPr>
+          <p:cNvCxnSpPr>
+            <a:cxnSpLocks/>
+            <a:stCxn id="9" idx="3"/>
+            <a:endCxn id="11" idx="1"/>
+          </p:cNvCxnSpPr>
+          <p:nvPr/>
+        </p:nvCxnSpPr>
+        <p:spPr>
+          <a:xfrm flipV="1">
+            <a:off x="2672049" y="4976942"/>
+            <a:ext cx="2492406" cy="323629"/>
+          </a:xfrm>
+          <a:prstGeom prst="straightConnector1">
+            <a:avLst/>
+          </a:prstGeom>
+          <a:ln w="38100">
+            <a:solidFill>
+              <a:srgbClr val="FF0000"/>
+            </a:solidFill>
+            <a:tailEnd type="triangle"/>
+          </a:ln>
+        </p:spPr>
+        <p:style>
+          <a:lnRef idx="2">
+            <a:schemeClr val="accent1"/>
+          </a:lnRef>
+          <a:fillRef idx="0">
+            <a:schemeClr val="accent1"/>
+          </a:fillRef>
+          <a:effectRef idx="1">
+            <a:schemeClr val="accent1"/>
+          </a:effectRef>
+          <a:fontRef idx="minor">
+            <a:schemeClr val="tx1"/>
+          </a:fontRef>
+        </p:style>
+      </p:cxnSp>
+      <p:sp>
+        <p:nvSpPr>
+          <p:cNvPr id="22" name="TextBox 21">
+            <a:extLst>
+              <a:ext uri="{FF2B5EF4-FFF2-40B4-BE49-F238E27FC236}">
+                <a16:creationId xmlns:a16="http://schemas.microsoft.com/office/drawing/2014/main" id="{B8C3E12A-BCA9-0F80-91E0-D93F6A090F25}"/>
+              </a:ext>
+            </a:extLst>
+          </p:cNvPr>
+          <p:cNvSpPr txBox="1"/>
+          <p:nvPr/>
+        </p:nvSpPr>
+        <p:spPr>
+          <a:xfrm rot="21228782">
+            <a:off x="2946923" y="4817284"/>
+            <a:ext cx="1808508" cy="307777"/>
+          </a:xfrm>
+          <a:prstGeom prst="rect">
+            <a:avLst/>
+          </a:prstGeom>
+          <a:noFill/>
+        </p:spPr>
+        <p:txBody>
+          <a:bodyPr wrap="none" rtlCol="0">
+            <a:spAutoFit/>
+          </a:bodyPr>
+          <a:lstStyle/>
+          <a:p>
+            <a:r>
+              <a:rPr lang="ko-KR" altLang="en-US" sz="1400"/>
+              <a:t>발급 받은 토큰 입력</a:t>
+            </a:r>
+            <a:endParaRPr lang="ko-KR" altLang="en-US" sz="1400" dirty="0"/>
+          </a:p>
+        </p:txBody>
+      </p:sp>
+      <p:sp>
+        <p:nvSpPr>
+          <p:cNvPr id="24" name="TextBox 23">
+            <a:extLst>
+              <a:ext uri="{FF2B5EF4-FFF2-40B4-BE49-F238E27FC236}">
+                <a16:creationId xmlns:a16="http://schemas.microsoft.com/office/drawing/2014/main" id="{FC005115-0695-173F-434D-71DC0B436B88}"/>
+              </a:ext>
+            </a:extLst>
+          </p:cNvPr>
+          <p:cNvSpPr txBox="1"/>
+          <p:nvPr/>
+        </p:nvSpPr>
+        <p:spPr>
+          <a:xfrm>
+            <a:off x="1115938" y="4424480"/>
+            <a:ext cx="1683474" cy="307777"/>
+          </a:xfrm>
+          <a:prstGeom prst="rect">
+            <a:avLst/>
+          </a:prstGeom>
+          <a:noFill/>
+        </p:spPr>
+        <p:txBody>
+          <a:bodyPr wrap="none" rtlCol="0">
+            <a:spAutoFit/>
+          </a:bodyPr>
+          <a:lstStyle/>
+          <a:p>
+            <a:r>
+              <a:rPr lang="en-US" altLang="ko-KR" sz="1400" dirty="0"/>
+              <a:t>Dooray/Config.md</a:t>
+            </a:r>
+            <a:endParaRPr lang="ko-KR" altLang="en-US" sz="1400" dirty="0"/>
+          </a:p>
+        </p:txBody>
+      </p:sp>
+      <p:sp>
+        <p:nvSpPr>
+          <p:cNvPr id="26" name="TextBox 25">
+            <a:extLst>
+              <a:ext uri="{FF2B5EF4-FFF2-40B4-BE49-F238E27FC236}">
+                <a16:creationId xmlns:a16="http://schemas.microsoft.com/office/drawing/2014/main" id="{8C57AB79-11B9-F3D2-50FF-7B0099B22E32}"/>
+              </a:ext>
+            </a:extLst>
+          </p:cNvPr>
+          <p:cNvSpPr txBox="1"/>
+          <p:nvPr/>
+        </p:nvSpPr>
+        <p:spPr>
+          <a:xfrm>
+            <a:off x="2026958" y="3727777"/>
+            <a:ext cx="7046467" cy="369332"/>
+          </a:xfrm>
+          <a:prstGeom prst="rect">
+            <a:avLst/>
+          </a:prstGeom>
+          <a:noFill/>
+        </p:spPr>
+        <p:txBody>
+          <a:bodyPr wrap="square">
+            <a:spAutoFit/>
+          </a:bodyPr>
+          <a:lstStyle/>
+          <a:p>
+            <a:r>
+              <a:rPr lang="ko-KR" altLang="en-US" dirty="0"/>
+              <a:t>토큰 발급은 최초 한번</a:t>
+            </a:r>
+            <a:r>
+              <a:rPr lang="en-US" altLang="ko-KR" dirty="0"/>
+              <a:t>, </a:t>
+            </a:r>
+            <a:r>
+              <a:rPr lang="ko-KR" altLang="en-US" dirty="0"/>
+              <a:t>하나의 토큰으로 여러 프로젝트 사용 가능</a:t>
+            </a:r>
+          </a:p>
+        </p:txBody>
+      </p:sp>
+    </p:spTree>
+    <p:extLst>
+      <p:ext uri="{BB962C8B-B14F-4D97-AF65-F5344CB8AC3E}">
+        <p14:creationId xmlns:p14="http://schemas.microsoft.com/office/powerpoint/2010/main" val="3082572462"/>
+      </p:ext>
+    </p:extLst>
+  </p:cSld>
+  <p:clrMapOvr>
+    <a:masterClrMapping/>
+  </p:clrMapOvr>
+</p:sld>
+</file>
+
+<file path=ppt/slides/slide8.xml><?xml version="1.0" encoding="utf-8"?>
+<p:sld xmlns:a="http://schemas.openxmlformats.org/drawingml/2006/main" xmlns:r="http://schemas.openxmlformats.org/officeDocument/2006/relationships" xmlns:p="http://schemas.openxmlformats.org/presentationml/2006/main">
+  <p:cSld>
+    <p:spTree>
+      <p:nvGrpSpPr>
+        <p:cNvPr id="1" name=""/>
+        <p:cNvGrpSpPr/>
+        <p:nvPr/>
+      </p:nvGrpSpPr>
+      <p:grpSpPr>
+        <a:xfrm>
+          <a:off x="0" y="0"/>
+          <a:ext cx="0" cy="0"/>
+          <a:chOff x="0" y="0"/>
+          <a:chExt cx="0" cy="0"/>
+        </a:xfrm>
+      </p:grpSpPr>
       <p:pic>
         <p:nvPicPr>
-          <p:cNvPr id="9" name="Picture 2"/>
+          <p:cNvPr id="1027" name="Picture 3"/>
           <p:cNvPicPr>
             <a:picLocks noChangeAspect="1" noChangeArrowheads="1"/>
           </p:cNvPicPr>
           <p:nvPr/>
         </p:nvPicPr>
         <p:blipFill>
-          <a:blip r:embed="rId4">
+          <a:blip r:embed="rId2">
             <a:extLst>
               <a:ext uri="{28A0092B-C50C-407E-A947-70E740481C1C}">
                 <a14:useLocalDpi xmlns:a14="http://schemas.microsoft.com/office/drawing/2010/main" val="0"/>
@@ -3985,8 +6740,8 @@
         </p:blipFill>
         <p:spPr bwMode="auto">
           <a:xfrm>
-            <a:off x="8391749" y="2597291"/>
-            <a:ext cx="2228850" cy="1162050"/>
+            <a:off x="736778" y="1680322"/>
+            <a:ext cx="2682912" cy="3276545"/>
           </a:xfrm>
           <a:prstGeom prst="rect">
             <a:avLst/>
@@ -4018,10 +6773,10 @@
       </p:pic>
       <p:sp>
         <p:nvSpPr>
-          <p:cNvPr id="10" name="직사각형 9">
-            <a:extLst>
-              <a:ext uri="{FF2B5EF4-FFF2-40B4-BE49-F238E27FC236}">
-                <a16:creationId xmlns:a16="http://schemas.microsoft.com/office/drawing/2014/main" xmlns="" id="{1439A115-EE2F-06C4-1611-95B75A9662C0}"/>
+          <p:cNvPr id="6" name="직사각형 5">
+            <a:extLst>
+              <a:ext uri="{FF2B5EF4-FFF2-40B4-BE49-F238E27FC236}">
+                <a16:creationId xmlns:a16="http://schemas.microsoft.com/office/drawing/2014/main" id="{1439A115-EE2F-06C4-1611-95B75A9662C0}"/>
               </a:ext>
             </a:extLst>
           </p:cNvPr>
@@ -4030,8 +6785,8 @@
         </p:nvSpPr>
         <p:spPr>
           <a:xfrm>
-            <a:off x="8391749" y="2736733"/>
-            <a:ext cx="2613324" cy="287228"/>
+            <a:off x="736778" y="2363474"/>
+            <a:ext cx="511109" cy="422757"/>
           </a:xfrm>
           <a:prstGeom prst="rect">
             <a:avLst/>
@@ -4068,10 +6823,424 @@
           </a:p>
         </p:txBody>
       </p:sp>
+      <p:pic>
+        <p:nvPicPr>
+          <p:cNvPr id="1028" name="Picture 4"/>
+          <p:cNvPicPr>
+            <a:picLocks noChangeAspect="1" noChangeArrowheads="1"/>
+          </p:cNvPicPr>
+          <p:nvPr/>
+        </p:nvPicPr>
+        <p:blipFill>
+          <a:blip r:embed="rId3">
+            <a:extLst>
+              <a:ext uri="{28A0092B-C50C-407E-A947-70E740481C1C}">
+                <a14:useLocalDpi xmlns:a14="http://schemas.microsoft.com/office/drawing/2010/main" val="0"/>
+              </a:ext>
+            </a:extLst>
+          </a:blip>
+          <a:srcRect/>
+          <a:stretch>
+            <a:fillRect/>
+          </a:stretch>
+        </p:blipFill>
+        <p:spPr bwMode="auto">
+          <a:xfrm>
+            <a:off x="4569311" y="1680322"/>
+            <a:ext cx="3194125" cy="2794859"/>
+          </a:xfrm>
+          <a:prstGeom prst="rect">
+            <a:avLst/>
+          </a:prstGeom>
+          <a:noFill/>
+          <a:ln>
+            <a:noFill/>
+          </a:ln>
+          <a:extLst>
+            <a:ext uri="{909E8E84-426E-40DD-AFC4-6F175D3DCCD1}">
+              <a14:hiddenFill xmlns:a14="http://schemas.microsoft.com/office/drawing/2010/main">
+                <a:solidFill>
+                  <a:schemeClr val="accent1"/>
+                </a:solidFill>
+              </a14:hiddenFill>
+            </a:ext>
+            <a:ext uri="{91240B29-F687-4F45-9708-019B960494DF}">
+              <a14:hiddenLine xmlns:a14="http://schemas.microsoft.com/office/drawing/2010/main" w="9525">
+                <a:solidFill>
+                  <a:schemeClr val="tx1"/>
+                </a:solidFill>
+                <a:miter lim="800000"/>
+                <a:headEnd/>
+                <a:tailEnd/>
+              </a14:hiddenLine>
+            </a:ext>
+          </a:extLst>
+        </p:spPr>
+      </p:pic>
+      <p:sp>
+        <p:nvSpPr>
+          <p:cNvPr id="8" name="직사각형 7">
+            <a:extLst>
+              <a:ext uri="{FF2B5EF4-FFF2-40B4-BE49-F238E27FC236}">
+                <a16:creationId xmlns:a16="http://schemas.microsoft.com/office/drawing/2014/main" id="{1439A115-EE2F-06C4-1611-95B75A9662C0}"/>
+              </a:ext>
+            </a:extLst>
+          </p:cNvPr>
+          <p:cNvSpPr/>
+          <p:nvPr/>
+        </p:nvSpPr>
+        <p:spPr>
+          <a:xfrm>
+            <a:off x="4654355" y="2010830"/>
+            <a:ext cx="1348412" cy="422757"/>
+          </a:xfrm>
+          <a:prstGeom prst="rect">
+            <a:avLst/>
+          </a:prstGeom>
+          <a:noFill/>
+          <a:ln w="38100">
+            <a:solidFill>
+              <a:srgbClr val="FF0000"/>
+            </a:solidFill>
+          </a:ln>
+        </p:spPr>
+        <p:style>
+          <a:lnRef idx="2">
+            <a:schemeClr val="accent1">
+              <a:shade val="15000"/>
+            </a:schemeClr>
+          </a:lnRef>
+          <a:fillRef idx="1">
+            <a:schemeClr val="accent1"/>
+          </a:fillRef>
+          <a:effectRef idx="0">
+            <a:schemeClr val="accent1"/>
+          </a:effectRef>
+          <a:fontRef idx="minor">
+            <a:schemeClr val="lt1"/>
+          </a:fontRef>
+        </p:style>
+        <p:txBody>
+          <a:bodyPr rtlCol="0" anchor="ctr"/>
+          <a:lstStyle/>
+          <a:p>
+            <a:pPr algn="ctr"/>
+            <a:endParaRPr lang="ko-KR" altLang="en-US"/>
+          </a:p>
+        </p:txBody>
+      </p:sp>
+      <p:pic>
+        <p:nvPicPr>
+          <p:cNvPr id="9" name="Picture 2"/>
+          <p:cNvPicPr>
+            <a:picLocks noChangeAspect="1" noChangeArrowheads="1"/>
+          </p:cNvPicPr>
+          <p:nvPr/>
+        </p:nvPicPr>
+        <p:blipFill>
+          <a:blip r:embed="rId4">
+            <a:extLst>
+              <a:ext uri="{28A0092B-C50C-407E-A947-70E740481C1C}">
+                <a14:useLocalDpi xmlns:a14="http://schemas.microsoft.com/office/drawing/2010/main" val="0"/>
+              </a:ext>
+            </a:extLst>
+          </a:blip>
+          <a:srcRect/>
+          <a:stretch>
+            <a:fillRect/>
+          </a:stretch>
+        </p:blipFill>
+        <p:spPr bwMode="auto">
+          <a:xfrm>
+            <a:off x="8391749" y="2597291"/>
+            <a:ext cx="2228850" cy="1162050"/>
+          </a:xfrm>
+          <a:prstGeom prst="rect">
+            <a:avLst/>
+          </a:prstGeom>
+          <a:noFill/>
+          <a:ln>
+            <a:noFill/>
+          </a:ln>
+          <a:extLst>
+            <a:ext uri="{909E8E84-426E-40DD-AFC4-6F175D3DCCD1}">
+              <a14:hiddenFill xmlns:a14="http://schemas.microsoft.com/office/drawing/2010/main">
+                <a:solidFill>
+                  <a:schemeClr val="accent1"/>
+                </a:solidFill>
+              </a14:hiddenFill>
+            </a:ext>
+            <a:ext uri="{91240B29-F687-4F45-9708-019B960494DF}">
+              <a14:hiddenLine xmlns:a14="http://schemas.microsoft.com/office/drawing/2010/main" w="9525">
+                <a:solidFill>
+                  <a:schemeClr val="tx1"/>
+                </a:solidFill>
+                <a:miter lim="800000"/>
+                <a:headEnd/>
+                <a:tailEnd/>
+              </a14:hiddenLine>
+            </a:ext>
+          </a:extLst>
+        </p:spPr>
+      </p:pic>
+      <p:sp>
+        <p:nvSpPr>
+          <p:cNvPr id="10" name="직사각형 9">
+            <a:extLst>
+              <a:ext uri="{FF2B5EF4-FFF2-40B4-BE49-F238E27FC236}">
+                <a16:creationId xmlns:a16="http://schemas.microsoft.com/office/drawing/2014/main" id="{1439A115-EE2F-06C4-1611-95B75A9662C0}"/>
+              </a:ext>
+            </a:extLst>
+          </p:cNvPr>
+          <p:cNvSpPr/>
+          <p:nvPr/>
+        </p:nvSpPr>
+        <p:spPr>
+          <a:xfrm>
+            <a:off x="8391749" y="2736733"/>
+            <a:ext cx="2613324" cy="287228"/>
+          </a:xfrm>
+          <a:prstGeom prst="rect">
+            <a:avLst/>
+          </a:prstGeom>
+          <a:noFill/>
+          <a:ln w="38100">
+            <a:solidFill>
+              <a:srgbClr val="FF0000"/>
+            </a:solidFill>
+          </a:ln>
+        </p:spPr>
+        <p:style>
+          <a:lnRef idx="2">
+            <a:schemeClr val="accent1">
+              <a:shade val="15000"/>
+            </a:schemeClr>
+          </a:lnRef>
+          <a:fillRef idx="1">
+            <a:schemeClr val="accent1"/>
+          </a:fillRef>
+          <a:effectRef idx="0">
+            <a:schemeClr val="accent1"/>
+          </a:effectRef>
+          <a:fontRef idx="minor">
+            <a:schemeClr val="lt1"/>
+          </a:fontRef>
+        </p:style>
+        <p:txBody>
+          <a:bodyPr rtlCol="0" anchor="ctr"/>
+          <a:lstStyle/>
+          <a:p>
+            <a:pPr algn="ctr"/>
+            <a:endParaRPr lang="ko-KR" altLang="en-US"/>
+          </a:p>
+        </p:txBody>
+      </p:sp>
+      <p:cxnSp>
+        <p:nvCxnSpPr>
+          <p:cNvPr id="2" name="직선 화살표 연결선 1">
+            <a:extLst>
+              <a:ext uri="{FF2B5EF4-FFF2-40B4-BE49-F238E27FC236}">
+                <a16:creationId xmlns:a16="http://schemas.microsoft.com/office/drawing/2014/main" id="{978D7D98-7545-2696-3618-53B561CDE609}"/>
+              </a:ext>
+            </a:extLst>
+          </p:cNvPr>
+          <p:cNvCxnSpPr>
+            <a:cxnSpLocks/>
+            <a:stCxn id="6" idx="3"/>
+            <a:endCxn id="8" idx="1"/>
+          </p:cNvCxnSpPr>
+          <p:nvPr/>
+        </p:nvCxnSpPr>
+        <p:spPr>
+          <a:xfrm flipV="1">
+            <a:off x="1247887" y="2222209"/>
+            <a:ext cx="3406468" cy="352644"/>
+          </a:xfrm>
+          <a:prstGeom prst="straightConnector1">
+            <a:avLst/>
+          </a:prstGeom>
+          <a:ln w="38100">
+            <a:solidFill>
+              <a:srgbClr val="FF0000"/>
+            </a:solidFill>
+            <a:tailEnd type="triangle"/>
+          </a:ln>
+        </p:spPr>
+        <p:style>
+          <a:lnRef idx="2">
+            <a:schemeClr val="accent1"/>
+          </a:lnRef>
+          <a:fillRef idx="0">
+            <a:schemeClr val="accent1"/>
+          </a:fillRef>
+          <a:effectRef idx="1">
+            <a:schemeClr val="accent1"/>
+          </a:effectRef>
+          <a:fontRef idx="minor">
+            <a:schemeClr val="tx1"/>
+          </a:fontRef>
+        </p:style>
+      </p:cxnSp>
+      <p:cxnSp>
+        <p:nvCxnSpPr>
+          <p:cNvPr id="5" name="직선 화살표 연결선 4">
+            <a:extLst>
+              <a:ext uri="{FF2B5EF4-FFF2-40B4-BE49-F238E27FC236}">
+                <a16:creationId xmlns:a16="http://schemas.microsoft.com/office/drawing/2014/main" id="{834887D8-76F1-0EA7-4EF4-41F849FE8427}"/>
+              </a:ext>
+            </a:extLst>
+          </p:cNvPr>
+          <p:cNvCxnSpPr>
+            <a:cxnSpLocks/>
+            <a:stCxn id="8" idx="3"/>
+          </p:cNvCxnSpPr>
+          <p:nvPr/>
+        </p:nvCxnSpPr>
+        <p:spPr>
+          <a:xfrm>
+            <a:off x="6002767" y="2222209"/>
+            <a:ext cx="2441625" cy="643729"/>
+          </a:xfrm>
+          <a:prstGeom prst="straightConnector1">
+            <a:avLst/>
+          </a:prstGeom>
+          <a:ln w="38100">
+            <a:solidFill>
+              <a:srgbClr val="FF0000"/>
+            </a:solidFill>
+            <a:tailEnd type="triangle"/>
+          </a:ln>
+        </p:spPr>
+        <p:style>
+          <a:lnRef idx="2">
+            <a:schemeClr val="accent1"/>
+          </a:lnRef>
+          <a:fillRef idx="0">
+            <a:schemeClr val="accent1"/>
+          </a:fillRef>
+          <a:effectRef idx="1">
+            <a:schemeClr val="accent1"/>
+          </a:effectRef>
+          <a:fontRef idx="minor">
+            <a:schemeClr val="tx1"/>
+          </a:fontRef>
+        </p:style>
+      </p:cxnSp>
+      <p:sp>
+        <p:nvSpPr>
+          <p:cNvPr id="12" name="TextBox 11">
+            <a:extLst>
+              <a:ext uri="{FF2B5EF4-FFF2-40B4-BE49-F238E27FC236}">
+                <a16:creationId xmlns:a16="http://schemas.microsoft.com/office/drawing/2014/main" id="{B002ADF3-6F83-212A-FC49-065068555E6F}"/>
+              </a:ext>
+            </a:extLst>
+          </p:cNvPr>
+          <p:cNvSpPr txBox="1"/>
+          <p:nvPr/>
+        </p:nvSpPr>
+        <p:spPr>
+          <a:xfrm>
+            <a:off x="9439425" y="2727438"/>
+            <a:ext cx="1275221" cy="276999"/>
+          </a:xfrm>
+          <a:prstGeom prst="rect">
+            <a:avLst/>
+          </a:prstGeom>
+          <a:noFill/>
+        </p:spPr>
+        <p:txBody>
+          <a:bodyPr wrap="none" rtlCol="0">
+            <a:spAutoFit/>
+          </a:bodyPr>
+          <a:lstStyle/>
+          <a:p>
+            <a:r>
+              <a:rPr lang="en-US" altLang="ko-KR" sz="1200" dirty="0"/>
+              <a:t>Dooray-Test001</a:t>
+            </a:r>
+            <a:endParaRPr lang="ko-KR" altLang="en-US" sz="1200" dirty="0"/>
+          </a:p>
+        </p:txBody>
+      </p:sp>
     </p:spTree>
     <p:extLst>
       <p:ext uri="{BB962C8B-B14F-4D97-AF65-F5344CB8AC3E}">
         <p14:creationId xmlns:p14="http://schemas.microsoft.com/office/powerpoint/2010/main" val="4265568713"/>
+      </p:ext>
+    </p:extLst>
+  </p:cSld>
+  <p:clrMapOvr>
+    <a:masterClrMapping/>
+  </p:clrMapOvr>
+</p:sld>
+</file>
+
+<file path=ppt/slides/slide9.xml><?xml version="1.0" encoding="utf-8"?>
+<p:sld xmlns:a="http://schemas.openxmlformats.org/drawingml/2006/main" xmlns:r="http://schemas.openxmlformats.org/officeDocument/2006/relationships" xmlns:p="http://schemas.openxmlformats.org/presentationml/2006/main">
+  <p:cSld>
+    <p:spTree>
+      <p:nvGrpSpPr>
+        <p:cNvPr id="1" name="">
+          <a:extLst>
+            <a:ext uri="{FF2B5EF4-FFF2-40B4-BE49-F238E27FC236}">
+              <a16:creationId xmlns:a16="http://schemas.microsoft.com/office/drawing/2014/main" id="{68E3415A-EDE5-9B36-86A5-17D3E6943B04}"/>
+            </a:ext>
+          </a:extLst>
+        </p:cNvPr>
+        <p:cNvGrpSpPr/>
+        <p:nvPr/>
+      </p:nvGrpSpPr>
+      <p:grpSpPr>
+        <a:xfrm>
+          <a:off x="0" y="0"/>
+          <a:ext cx="0" cy="0"/>
+          <a:chOff x="0" y="0"/>
+          <a:chExt cx="0" cy="0"/>
+        </a:xfrm>
+      </p:grpSpPr>
+      <p:sp>
+        <p:nvSpPr>
+          <p:cNvPr id="4" name="TextBox 3">
+            <a:extLst>
+              <a:ext uri="{FF2B5EF4-FFF2-40B4-BE49-F238E27FC236}">
+                <a16:creationId xmlns:a16="http://schemas.microsoft.com/office/drawing/2014/main" id="{0FB5C413-468D-A233-9F29-6BFF72BABC68}"/>
+              </a:ext>
+            </a:extLst>
+          </p:cNvPr>
+          <p:cNvSpPr txBox="1"/>
+          <p:nvPr/>
+        </p:nvSpPr>
+        <p:spPr>
+          <a:xfrm>
+            <a:off x="2178604" y="2976403"/>
+            <a:ext cx="3074881" cy="769441"/>
+          </a:xfrm>
+          <a:prstGeom prst="rect">
+            <a:avLst/>
+          </a:prstGeom>
+          <a:noFill/>
+        </p:spPr>
+        <p:txBody>
+          <a:bodyPr wrap="none" rtlCol="0">
+            <a:spAutoFit/>
+          </a:bodyPr>
+          <a:lstStyle/>
+          <a:p>
+            <a:r>
+              <a:rPr lang="en-US" altLang="ko-KR" sz="4400" dirty="0"/>
+              <a:t>3. </a:t>
+            </a:r>
+            <a:r>
+              <a:rPr lang="ko-KR" altLang="en-US" sz="4400" dirty="0"/>
+              <a:t>사용하기</a:t>
+            </a:r>
+          </a:p>
+        </p:txBody>
+      </p:sp>
+    </p:spTree>
+    <p:extLst>
+      <p:ext uri="{BB962C8B-B14F-4D97-AF65-F5344CB8AC3E}">
+        <p14:creationId xmlns:p14="http://schemas.microsoft.com/office/powerpoint/2010/main" val="4091406967"/>
       </p:ext>
     </p:extLst>
   </p:cSld>
@@ -4390,7 +7559,7 @@
   <a:extraClrSchemeLst/>
   <a:extLst>
     <a:ext uri="{05A4C25C-085E-4340-85A3-A5531E510DB2}">
-      <thm15:themeFamily xmlns:thm15="http://schemas.microsoft.com/office/thememl/2012/main" xmlns="" name="Office Theme" id="{2E142A2C-CD16-42D6-873A-C26D2A0506FA}" vid="{1BDDFF52-6CD6-40A5-AB3C-68EB2F1E4D0A}"/>
+      <thm15:themeFamily xmlns:thm15="http://schemas.microsoft.com/office/thememl/2012/main" name="Office Theme" id="{2E142A2C-CD16-42D6-873A-C26D2A0506FA}" vid="{1BDDFF52-6CD6-40A5-AB3C-68EB2F1E4D0A}"/>
     </a:ext>
   </a:extLst>
 </a:theme>
